--- a/Software Engineering Capstone/05.4. Claude Code.pptx
+++ b/Software Engineering Capstone/05.4. Claude Code.pptx
@@ -5,10 +5,10 @@
     <p:sldMasterId id="2147483708" r:id="rId1"/>
   </p:sldMasterIdLst>
   <p:notesMasterIdLst>
-    <p:notesMasterId r:id="rId53"/>
+    <p:notesMasterId r:id="rId54"/>
   </p:notesMasterIdLst>
   <p:handoutMasterIdLst>
-    <p:handoutMasterId r:id="rId54"/>
+    <p:handoutMasterId r:id="rId55"/>
   </p:handoutMasterIdLst>
   <p:sldIdLst>
     <p:sldId id="256" r:id="rId2"/>
@@ -57,11 +57,12 @@
     <p:sldId id="607" r:id="rId45"/>
     <p:sldId id="601" r:id="rId46"/>
     <p:sldId id="609" r:id="rId47"/>
-    <p:sldId id="608" r:id="rId48"/>
-    <p:sldId id="586" r:id="rId49"/>
-    <p:sldId id="583" r:id="rId50"/>
-    <p:sldId id="584" r:id="rId51"/>
-    <p:sldId id="343" r:id="rId52"/>
+    <p:sldId id="611" r:id="rId48"/>
+    <p:sldId id="608" r:id="rId49"/>
+    <p:sldId id="586" r:id="rId50"/>
+    <p:sldId id="583" r:id="rId51"/>
+    <p:sldId id="584" r:id="rId52"/>
+    <p:sldId id="343" r:id="rId53"/>
   </p:sldIdLst>
   <p:sldSz cx="9144000" cy="6858000" type="screen4x3"/>
   <p:notesSz cx="6858000" cy="9144000"/>
@@ -276,7 +277,7 @@
             <a:fld id="{50D0DBAB-D1C9-4D1B-A41F-EB0AC0278643}" type="datetimeFigureOut">
               <a:rPr lang="en-US" smtClean="0"/>
               <a:pPr/>
-              <a:t>5/15/2026</a:t>
+              <a:t>7/10/2026</a:t>
             </a:fld>
             <a:endParaRPr lang="en-US"/>
           </a:p>
@@ -438,7 +439,7 @@
             <a:fld id="{51300FB1-EAA8-41B6-84E0-C0BE923892D9}" type="datetimeFigureOut">
               <a:rPr lang="en-US" smtClean="0"/>
               <a:pPr/>
-              <a:t>5/15/2026</a:t>
+              <a:t>7/10/2026</a:t>
             </a:fld>
             <a:endParaRPr lang="en-US"/>
           </a:p>
@@ -895,7 +896,7 @@
               <a:pPr>
                 <a:defRPr/>
               </a:pPr>
-              <a:t>5/15/2026</a:t>
+              <a:t>7/10/2026</a:t>
             </a:fld>
             <a:endParaRPr lang="en-US"/>
           </a:p>
@@ -1087,7 +1088,7 @@
               <a:pPr>
                 <a:defRPr/>
               </a:pPr>
-              <a:t>5/15/2026</a:t>
+              <a:t>7/10/2026</a:t>
             </a:fld>
             <a:endParaRPr lang="en-US"/>
           </a:p>
@@ -1289,7 +1290,7 @@
               <a:pPr>
                 <a:defRPr/>
               </a:pPr>
-              <a:t>5/15/2026</a:t>
+              <a:t>7/10/2026</a:t>
             </a:fld>
             <a:endParaRPr lang="en-US"/>
           </a:p>
@@ -1481,7 +1482,7 @@
               <a:pPr>
                 <a:defRPr/>
               </a:pPr>
-              <a:t>5/15/2026</a:t>
+              <a:t>7/10/2026</a:t>
             </a:fld>
             <a:endParaRPr lang="en-US"/>
           </a:p>
@@ -1749,7 +1750,7 @@
               <a:pPr>
                 <a:defRPr/>
               </a:pPr>
-              <a:t>5/15/2026</a:t>
+              <a:t>7/10/2026</a:t>
             </a:fld>
             <a:endParaRPr lang="en-US"/>
           </a:p>
@@ -2059,7 +2060,7 @@
               <a:pPr>
                 <a:defRPr/>
               </a:pPr>
-              <a:t>5/15/2026</a:t>
+              <a:t>7/10/2026</a:t>
             </a:fld>
             <a:endParaRPr lang="en-US"/>
           </a:p>
@@ -2503,7 +2504,7 @@
               <a:pPr>
                 <a:defRPr/>
               </a:pPr>
-              <a:t>5/15/2026</a:t>
+              <a:t>7/10/2026</a:t>
             </a:fld>
             <a:endParaRPr lang="en-US"/>
           </a:p>
@@ -2643,7 +2644,7 @@
               <a:pPr>
                 <a:defRPr/>
               </a:pPr>
-              <a:t>5/15/2026</a:t>
+              <a:t>7/10/2026</a:t>
             </a:fld>
             <a:endParaRPr lang="en-US"/>
           </a:p>
@@ -2760,7 +2761,7 @@
               <a:pPr>
                 <a:defRPr/>
               </a:pPr>
-              <a:t>5/15/2026</a:t>
+              <a:t>7/10/2026</a:t>
             </a:fld>
             <a:endParaRPr lang="en-US"/>
           </a:p>
@@ -3059,7 +3060,7 @@
               <a:pPr>
                 <a:defRPr/>
               </a:pPr>
-              <a:t>5/15/2026</a:t>
+              <a:t>7/10/2026</a:t>
             </a:fld>
             <a:endParaRPr lang="en-US"/>
           </a:p>
@@ -3337,7 +3338,7 @@
               <a:pPr>
                 <a:defRPr/>
               </a:pPr>
-              <a:t>5/15/2026</a:t>
+              <a:t>7/10/2026</a:t>
             </a:fld>
             <a:endParaRPr lang="en-US"/>
           </a:p>
@@ -3585,7 +3586,7 @@
               <a:pPr>
                 <a:defRPr/>
               </a:pPr>
-              <a:t>5/15/2026</a:t>
+              <a:t>7/10/2026</a:t>
             </a:fld>
             <a:endParaRPr lang="en-US"/>
           </a:p>
@@ -7936,11 +7937,7 @@
           <a:p>
             <a:r>
               <a:rPr lang="en-US" sz="2400" dirty="0" smtClean="0"/>
-              <a:t>/</a:t>
-            </a:r>
-            <a:r>
-              <a:rPr lang="en-US" sz="2400" dirty="0" smtClean="0"/>
-              <a:t>reload-</a:t>
+              <a:t>/reload-</a:t>
             </a:r>
             <a:r>
               <a:rPr lang="en-US" sz="2400" dirty="0" err="1" smtClean="0"/>
@@ -7951,11 +7948,7 @@
           <a:p>
             <a:r>
               <a:rPr lang="en-US" sz="2400" dirty="0" smtClean="0"/>
-              <a:t>/</a:t>
-            </a:r>
-            <a:r>
-              <a:rPr lang="en-US" sz="2400" dirty="0" smtClean="0"/>
-              <a:t>academic-research-</a:t>
+              <a:t>/academic-research-</a:t>
             </a:r>
             <a:r>
               <a:rPr lang="en-US" sz="2400" dirty="0" err="1" smtClean="0"/>
@@ -7980,6 +7973,129 @@
 </file>
 
 <file path=ppt/slides/slide47.xml><?xml version="1.0" encoding="utf-8"?>
+<p:sld xmlns:a="http://schemas.openxmlformats.org/drawingml/2006/main" xmlns:r="http://schemas.openxmlformats.org/officeDocument/2006/relationships" xmlns:p="http://schemas.openxmlformats.org/presentationml/2006/main">
+  <p:cSld>
+    <p:spTree>
+      <p:nvGrpSpPr>
+        <p:cNvPr id="1" name=""/>
+        <p:cNvGrpSpPr/>
+        <p:nvPr/>
+      </p:nvGrpSpPr>
+      <p:grpSpPr>
+        <a:xfrm>
+          <a:off x="0" y="0"/>
+          <a:ext cx="0" cy="0"/>
+          <a:chOff x="0" y="0"/>
+          <a:chExt cx="0" cy="0"/>
+        </a:xfrm>
+      </p:grpSpPr>
+      <p:sp>
+        <p:nvSpPr>
+          <p:cNvPr id="2" name="Title 1"/>
+          <p:cNvSpPr>
+            <a:spLocks noGrp="1"/>
+          </p:cNvSpPr>
+          <p:nvPr>
+            <p:ph type="title"/>
+          </p:nvPr>
+        </p:nvSpPr>
+        <p:spPr/>
+        <p:txBody>
+          <a:bodyPr/>
+          <a:lstStyle/>
+          <a:p>
+            <a:pPr algn="l"/>
+            <a:r>
+              <a:rPr lang="en-US" dirty="0" smtClean="0"/>
+              <a:t>2. </a:t>
+            </a:r>
+            <a:r>
+              <a:rPr lang="en-US" dirty="0" smtClean="0"/>
+              <a:t>Install a </a:t>
+            </a:r>
+            <a:r>
+              <a:rPr lang="en-US" dirty="0" smtClean="0"/>
+              <a:t>Viewer</a:t>
+            </a:r>
+            <a:endParaRPr lang="en-US" dirty="0"/>
+          </a:p>
+        </p:txBody>
+      </p:sp>
+      <p:sp>
+        <p:nvSpPr>
+          <p:cNvPr id="3" name="Content Placeholder 2"/>
+          <p:cNvSpPr>
+            <a:spLocks noGrp="1"/>
+          </p:cNvSpPr>
+          <p:nvPr>
+            <p:ph idx="1"/>
+          </p:nvPr>
+        </p:nvSpPr>
+        <p:spPr/>
+        <p:txBody>
+          <a:bodyPr/>
+          <a:lstStyle/>
+          <a:p>
+            <a:r>
+              <a:rPr lang="en-US" dirty="0" err="1" smtClean="0"/>
+              <a:t>npx</a:t>
+            </a:r>
+            <a:r>
+              <a:rPr lang="en-US" dirty="0" smtClean="0"/>
+              <a:t> @</a:t>
+            </a:r>
+            <a:r>
+              <a:rPr lang="en-US" dirty="0" err="1" smtClean="0"/>
+              <a:t>kimuson</a:t>
+            </a:r>
+            <a:r>
+              <a:rPr lang="en-US" dirty="0" smtClean="0"/>
+              <a:t>/</a:t>
+            </a:r>
+            <a:r>
+              <a:rPr lang="en-US" dirty="0" err="1" smtClean="0"/>
+              <a:t>claude</a:t>
+            </a:r>
+            <a:r>
+              <a:rPr lang="en-US" dirty="0" smtClean="0"/>
+              <a:t>-code-viewer</a:t>
+            </a:r>
+          </a:p>
+          <a:p>
+            <a:r>
+              <a:rPr lang="en-US" smtClean="0">
+                <a:hlinkClick r:id="rId2"/>
+              </a:rPr>
+              <a:t>http://</a:t>
+            </a:r>
+            <a:r>
+              <a:rPr lang="en-US" smtClean="0">
+                <a:hlinkClick r:id="rId2"/>
+              </a:rPr>
+              <a:t>localhost:3000</a:t>
+            </a:r>
+            <a:r>
+              <a:rPr lang="en-US" smtClean="0">
+                <a:hlinkClick r:id="rId2"/>
+              </a:rPr>
+              <a:t>/</a:t>
+            </a:r>
+            <a:endParaRPr lang="en-US" smtClean="0"/>
+          </a:p>
+          <a:p>
+            <a:endParaRPr lang="en-US" dirty="0"/>
+          </a:p>
+        </p:txBody>
+      </p:sp>
+    </p:spTree>
+  </p:cSld>
+  <p:clrMapOvr>
+    <a:masterClrMapping/>
+  </p:clrMapOvr>
+</p:sld>
+</file>
+
+<file path=ppt/slides/slide48.xml><?xml version="1.0" encoding="utf-8"?>
 <p:sld xmlns:a="http://schemas.openxmlformats.org/drawingml/2006/main" xmlns:r="http://schemas.openxmlformats.org/officeDocument/2006/relationships" xmlns:p="http://schemas.openxmlformats.org/presentationml/2006/main">
   <p:cSld>
     <p:spTree>
@@ -8030,7 +8146,7 @@
 </p:sld>
 </file>
 
-<file path=ppt/slides/slide48.xml><?xml version="1.0" encoding="utf-8"?>
+<file path=ppt/slides/slide49.xml><?xml version="1.0" encoding="utf-8"?>
 <p:sld xmlns:a="http://schemas.openxmlformats.org/drawingml/2006/main" xmlns:r="http://schemas.openxmlformats.org/officeDocument/2006/relationships" xmlns:p="http://schemas.openxmlformats.org/presentationml/2006/main">
   <p:cSld>
     <p:spTree>
@@ -8189,7 +8305,84 @@
 </p:sld>
 </file>
 
-<file path=ppt/slides/slide49.xml><?xml version="1.0" encoding="utf-8"?>
+<file path=ppt/slides/slide5.xml><?xml version="1.0" encoding="utf-8"?>
+<p:sld xmlns:a="http://schemas.openxmlformats.org/drawingml/2006/main" xmlns:r="http://schemas.openxmlformats.org/officeDocument/2006/relationships" xmlns:p="http://schemas.openxmlformats.org/presentationml/2006/main">
+  <p:cSld>
+    <p:spTree>
+      <p:nvGrpSpPr>
+        <p:cNvPr id="1" name=""/>
+        <p:cNvGrpSpPr/>
+        <p:nvPr/>
+      </p:nvGrpSpPr>
+      <p:grpSpPr>
+        <a:xfrm>
+          <a:off x="0" y="0"/>
+          <a:ext cx="0" cy="0"/>
+          <a:chOff x="0" y="0"/>
+          <a:chExt cx="0" cy="0"/>
+        </a:xfrm>
+      </p:grpSpPr>
+      <p:sp>
+        <p:nvSpPr>
+          <p:cNvPr id="2" name="Title 1"/>
+          <p:cNvSpPr>
+            <a:spLocks noGrp="1"/>
+          </p:cNvSpPr>
+          <p:nvPr>
+            <p:ph type="title"/>
+          </p:nvPr>
+        </p:nvSpPr>
+        <p:spPr/>
+        <p:txBody>
+          <a:bodyPr/>
+          <a:lstStyle/>
+          <a:p>
+            <a:pPr algn="l"/>
+            <a:r>
+              <a:rPr lang="en-US" dirty="0" smtClean="0"/>
+              <a:t>1. Buy Claude Pro Plan</a:t>
+            </a:r>
+            <a:endParaRPr lang="en-US" dirty="0"/>
+          </a:p>
+        </p:txBody>
+      </p:sp>
+      <p:sp>
+        <p:nvSpPr>
+          <p:cNvPr id="3" name="Content Placeholder 2"/>
+          <p:cNvSpPr>
+            <a:spLocks noGrp="1"/>
+          </p:cNvSpPr>
+          <p:nvPr>
+            <p:ph idx="1"/>
+          </p:nvPr>
+        </p:nvSpPr>
+        <p:spPr/>
+        <p:txBody>
+          <a:bodyPr/>
+          <a:lstStyle/>
+          <a:p>
+            <a:r>
+              <a:rPr lang="en-US" dirty="0" smtClean="0">
+                <a:hlinkClick r:id="rId2"/>
+              </a:rPr>
+              <a:t>https://claude.com/pricing</a:t>
+            </a:r>
+            <a:endParaRPr lang="en-US" dirty="0" smtClean="0"/>
+          </a:p>
+          <a:p>
+            <a:endParaRPr lang="en-US" dirty="0"/>
+          </a:p>
+        </p:txBody>
+      </p:sp>
+    </p:spTree>
+  </p:cSld>
+  <p:clrMapOvr>
+    <a:masterClrMapping/>
+  </p:clrMapOvr>
+</p:sld>
+</file>
+
+<file path=ppt/slides/slide50.xml><?xml version="1.0" encoding="utf-8"?>
 <p:sld xmlns:a="http://schemas.openxmlformats.org/drawingml/2006/main" xmlns:r="http://schemas.openxmlformats.org/officeDocument/2006/relationships" xmlns:p="http://schemas.openxmlformats.org/presentationml/2006/main">
   <p:cSld>
     <p:spTree>
@@ -8312,7 +8505,7 @@
 </p:sld>
 </file>
 
-<file path=ppt/slides/slide5.xml><?xml version="1.0" encoding="utf-8"?>
+<file path=ppt/slides/slide51.xml><?xml version="1.0" encoding="utf-8"?>
 <p:sld xmlns:a="http://schemas.openxmlformats.org/drawingml/2006/main" xmlns:r="http://schemas.openxmlformats.org/officeDocument/2006/relationships" xmlns:p="http://schemas.openxmlformats.org/presentationml/2006/main">
   <p:cSld>
     <p:spTree>
@@ -8347,7 +8540,7 @@
             <a:pPr algn="l"/>
             <a:r>
               <a:rPr lang="en-US" dirty="0" smtClean="0"/>
-              <a:t>1. Buy Claude Pro Plan</a:t>
+              <a:t>2. Enable Skills for Claude Desktop</a:t>
             </a:r>
             <a:endParaRPr lang="en-US" dirty="0"/>
           </a:p>
@@ -8369,15 +8562,15 @@
           <a:lstStyle/>
           <a:p>
             <a:r>
-              <a:rPr lang="en-US" dirty="0" smtClean="0">
+              <a:rPr lang="en-US" sz="2400" dirty="0" smtClean="0">
                 <a:hlinkClick r:id="rId2"/>
               </a:rPr>
-              <a:t>https://claude.com/pricing</a:t>
-            </a:r>
-            <a:endParaRPr lang="en-US" dirty="0" smtClean="0"/>
-          </a:p>
-          <a:p>
-            <a:endParaRPr lang="en-US" dirty="0"/>
+              <a:t>https://platform.claude.com/docs/en/agents-and-tools/agent-skills/overview</a:t>
+            </a:r>
+            <a:endParaRPr lang="en-US" sz="2400" dirty="0" smtClean="0"/>
+          </a:p>
+          <a:p>
+            <a:endParaRPr lang="en-US" sz="2400" dirty="0"/>
           </a:p>
         </p:txBody>
       </p:sp>
@@ -8389,84 +8582,7 @@
 </p:sld>
 </file>
 
-<file path=ppt/slides/slide50.xml><?xml version="1.0" encoding="utf-8"?>
-<p:sld xmlns:a="http://schemas.openxmlformats.org/drawingml/2006/main" xmlns:r="http://schemas.openxmlformats.org/officeDocument/2006/relationships" xmlns:p="http://schemas.openxmlformats.org/presentationml/2006/main">
-  <p:cSld>
-    <p:spTree>
-      <p:nvGrpSpPr>
-        <p:cNvPr id="1" name=""/>
-        <p:cNvGrpSpPr/>
-        <p:nvPr/>
-      </p:nvGrpSpPr>
-      <p:grpSpPr>
-        <a:xfrm>
-          <a:off x="0" y="0"/>
-          <a:ext cx="0" cy="0"/>
-          <a:chOff x="0" y="0"/>
-          <a:chExt cx="0" cy="0"/>
-        </a:xfrm>
-      </p:grpSpPr>
-      <p:sp>
-        <p:nvSpPr>
-          <p:cNvPr id="2" name="Title 1"/>
-          <p:cNvSpPr>
-            <a:spLocks noGrp="1"/>
-          </p:cNvSpPr>
-          <p:nvPr>
-            <p:ph type="title"/>
-          </p:nvPr>
-        </p:nvSpPr>
-        <p:spPr/>
-        <p:txBody>
-          <a:bodyPr/>
-          <a:lstStyle/>
-          <a:p>
-            <a:pPr algn="l"/>
-            <a:r>
-              <a:rPr lang="en-US" dirty="0" smtClean="0"/>
-              <a:t>2. Enable Skills for Claude Desktop</a:t>
-            </a:r>
-            <a:endParaRPr lang="en-US" dirty="0"/>
-          </a:p>
-        </p:txBody>
-      </p:sp>
-      <p:sp>
-        <p:nvSpPr>
-          <p:cNvPr id="3" name="Content Placeholder 2"/>
-          <p:cNvSpPr>
-            <a:spLocks noGrp="1"/>
-          </p:cNvSpPr>
-          <p:nvPr>
-            <p:ph idx="1"/>
-          </p:nvPr>
-        </p:nvSpPr>
-        <p:spPr/>
-        <p:txBody>
-          <a:bodyPr/>
-          <a:lstStyle/>
-          <a:p>
-            <a:r>
-              <a:rPr lang="en-US" sz="2400" dirty="0" smtClean="0">
-                <a:hlinkClick r:id="rId2"/>
-              </a:rPr>
-              <a:t>https://platform.claude.com/docs/en/agents-and-tools/agent-skills/overview</a:t>
-            </a:r>
-            <a:endParaRPr lang="en-US" sz="2400" dirty="0" smtClean="0"/>
-          </a:p>
-          <a:p>
-            <a:endParaRPr lang="en-US" sz="2400" dirty="0"/>
-          </a:p>
-        </p:txBody>
-      </p:sp>
-    </p:spTree>
-  </p:cSld>
-  <p:clrMapOvr>
-    <a:masterClrMapping/>
-  </p:clrMapOvr>
-</p:sld>
-</file>
-
-<file path=ppt/slides/slide51.xml><?xml version="1.0" encoding="utf-8"?>
+<file path=ppt/slides/slide52.xml><?xml version="1.0" encoding="utf-8"?>
 <p:sld xmlns:a="http://schemas.openxmlformats.org/drawingml/2006/main" xmlns:r="http://schemas.openxmlformats.org/officeDocument/2006/relationships" xmlns:p="http://schemas.openxmlformats.org/presentationml/2006/main">
   <p:cSld>
     <p:spTree>

--- a/Software Engineering Capstone/05.4. Claude Code.pptx
+++ b/Software Engineering Capstone/05.4. Claude Code.pptx
@@ -5,10 +5,10 @@
     <p:sldMasterId id="2147483708" r:id="rId1"/>
   </p:sldMasterIdLst>
   <p:notesMasterIdLst>
-    <p:notesMasterId r:id="rId54"/>
+    <p:notesMasterId r:id="rId55"/>
   </p:notesMasterIdLst>
   <p:handoutMasterIdLst>
-    <p:handoutMasterId r:id="rId55"/>
+    <p:handoutMasterId r:id="rId56"/>
   </p:handoutMasterIdLst>
   <p:sldIdLst>
     <p:sldId id="256" r:id="rId2"/>
@@ -58,11 +58,12 @@
     <p:sldId id="601" r:id="rId46"/>
     <p:sldId id="609" r:id="rId47"/>
     <p:sldId id="611" r:id="rId48"/>
-    <p:sldId id="608" r:id="rId49"/>
-    <p:sldId id="586" r:id="rId50"/>
-    <p:sldId id="583" r:id="rId51"/>
-    <p:sldId id="584" r:id="rId52"/>
-    <p:sldId id="343" r:id="rId53"/>
+    <p:sldId id="612" r:id="rId49"/>
+    <p:sldId id="608" r:id="rId50"/>
+    <p:sldId id="586" r:id="rId51"/>
+    <p:sldId id="583" r:id="rId52"/>
+    <p:sldId id="584" r:id="rId53"/>
+    <p:sldId id="343" r:id="rId54"/>
   </p:sldIdLst>
   <p:sldSz cx="9144000" cy="6858000" type="screen4x3"/>
   <p:notesSz cx="6858000" cy="9144000"/>
@@ -277,7 +278,7 @@
             <a:fld id="{50D0DBAB-D1C9-4D1B-A41F-EB0AC0278643}" type="datetimeFigureOut">
               <a:rPr lang="en-US" smtClean="0"/>
               <a:pPr/>
-              <a:t>7/10/2026</a:t>
+              <a:t>7/13/2026</a:t>
             </a:fld>
             <a:endParaRPr lang="en-US"/>
           </a:p>
@@ -439,7 +440,7 @@
             <a:fld id="{51300FB1-EAA8-41B6-84E0-C0BE923892D9}" type="datetimeFigureOut">
               <a:rPr lang="en-US" smtClean="0"/>
               <a:pPr/>
-              <a:t>7/10/2026</a:t>
+              <a:t>7/13/2026</a:t>
             </a:fld>
             <a:endParaRPr lang="en-US"/>
           </a:p>
@@ -896,7 +897,7 @@
               <a:pPr>
                 <a:defRPr/>
               </a:pPr>
-              <a:t>7/10/2026</a:t>
+              <a:t>7/13/2026</a:t>
             </a:fld>
             <a:endParaRPr lang="en-US"/>
           </a:p>
@@ -1088,7 +1089,7 @@
               <a:pPr>
                 <a:defRPr/>
               </a:pPr>
-              <a:t>7/10/2026</a:t>
+              <a:t>7/13/2026</a:t>
             </a:fld>
             <a:endParaRPr lang="en-US"/>
           </a:p>
@@ -1290,7 +1291,7 @@
               <a:pPr>
                 <a:defRPr/>
               </a:pPr>
-              <a:t>7/10/2026</a:t>
+              <a:t>7/13/2026</a:t>
             </a:fld>
             <a:endParaRPr lang="en-US"/>
           </a:p>
@@ -1482,7 +1483,7 @@
               <a:pPr>
                 <a:defRPr/>
               </a:pPr>
-              <a:t>7/10/2026</a:t>
+              <a:t>7/13/2026</a:t>
             </a:fld>
             <a:endParaRPr lang="en-US"/>
           </a:p>
@@ -1750,7 +1751,7 @@
               <a:pPr>
                 <a:defRPr/>
               </a:pPr>
-              <a:t>7/10/2026</a:t>
+              <a:t>7/13/2026</a:t>
             </a:fld>
             <a:endParaRPr lang="en-US"/>
           </a:p>
@@ -2060,7 +2061,7 @@
               <a:pPr>
                 <a:defRPr/>
               </a:pPr>
-              <a:t>7/10/2026</a:t>
+              <a:t>7/13/2026</a:t>
             </a:fld>
             <a:endParaRPr lang="en-US"/>
           </a:p>
@@ -2504,7 +2505,7 @@
               <a:pPr>
                 <a:defRPr/>
               </a:pPr>
-              <a:t>7/10/2026</a:t>
+              <a:t>7/13/2026</a:t>
             </a:fld>
             <a:endParaRPr lang="en-US"/>
           </a:p>
@@ -2644,7 +2645,7 @@
               <a:pPr>
                 <a:defRPr/>
               </a:pPr>
-              <a:t>7/10/2026</a:t>
+              <a:t>7/13/2026</a:t>
             </a:fld>
             <a:endParaRPr lang="en-US"/>
           </a:p>
@@ -2761,7 +2762,7 @@
               <a:pPr>
                 <a:defRPr/>
               </a:pPr>
-              <a:t>7/10/2026</a:t>
+              <a:t>7/13/2026</a:t>
             </a:fld>
             <a:endParaRPr lang="en-US"/>
           </a:p>
@@ -3060,7 +3061,7 @@
               <a:pPr>
                 <a:defRPr/>
               </a:pPr>
-              <a:t>7/10/2026</a:t>
+              <a:t>7/13/2026</a:t>
             </a:fld>
             <a:endParaRPr lang="en-US"/>
           </a:p>
@@ -3338,7 +3339,7 @@
               <a:pPr>
                 <a:defRPr/>
               </a:pPr>
-              <a:t>7/10/2026</a:t>
+              <a:t>7/13/2026</a:t>
             </a:fld>
             <a:endParaRPr lang="en-US"/>
           </a:p>
@@ -3586,7 +3587,7 @@
               <a:pPr>
                 <a:defRPr/>
               </a:pPr>
-              <a:t>7/10/2026</a:t>
+              <a:t>7/13/2026</a:t>
             </a:fld>
             <a:endParaRPr lang="en-US"/>
           </a:p>
@@ -8007,15 +8008,7 @@
             <a:pPr algn="l"/>
             <a:r>
               <a:rPr lang="en-US" dirty="0" smtClean="0"/>
-              <a:t>2. </a:t>
-            </a:r>
-            <a:r>
-              <a:rPr lang="en-US" dirty="0" smtClean="0"/>
-              <a:t>Install a </a:t>
-            </a:r>
-            <a:r>
-              <a:rPr lang="en-US" dirty="0" smtClean="0"/>
-              <a:t>Viewer</a:t>
+              <a:t>2. Install a Viewer</a:t>
             </a:r>
             <a:endParaRPr lang="en-US" dirty="0"/>
           </a:p>
@@ -8066,19 +8059,7 @@
               <a:rPr lang="en-US" smtClean="0">
                 <a:hlinkClick r:id="rId2"/>
               </a:rPr>
-              <a:t>http://</a:t>
-            </a:r>
-            <a:r>
-              <a:rPr lang="en-US" smtClean="0">
-                <a:hlinkClick r:id="rId2"/>
-              </a:rPr>
-              <a:t>localhost:3000</a:t>
-            </a:r>
-            <a:r>
-              <a:rPr lang="en-US" smtClean="0">
-                <a:hlinkClick r:id="rId2"/>
-              </a:rPr>
-              <a:t>/</a:t>
+              <a:t>http://localhost:3000/</a:t>
             </a:r>
             <a:endParaRPr lang="en-US" smtClean="0"/>
           </a:p>
@@ -8096,6 +8077,129 @@
 </file>
 
 <file path=ppt/slides/slide48.xml><?xml version="1.0" encoding="utf-8"?>
+<p:sld xmlns:a="http://schemas.openxmlformats.org/drawingml/2006/main" xmlns:r="http://schemas.openxmlformats.org/officeDocument/2006/relationships" xmlns:p="http://schemas.openxmlformats.org/presentationml/2006/main">
+  <p:cSld>
+    <p:spTree>
+      <p:nvGrpSpPr>
+        <p:cNvPr id="1" name=""/>
+        <p:cNvGrpSpPr/>
+        <p:nvPr/>
+      </p:nvGrpSpPr>
+      <p:grpSpPr>
+        <a:xfrm>
+          <a:off x="0" y="0"/>
+          <a:ext cx="0" cy="0"/>
+          <a:chOff x="0" y="0"/>
+          <a:chExt cx="0" cy="0"/>
+        </a:xfrm>
+      </p:grpSpPr>
+      <p:sp>
+        <p:nvSpPr>
+          <p:cNvPr id="2" name="Title 1"/>
+          <p:cNvSpPr>
+            <a:spLocks noGrp="1"/>
+          </p:cNvSpPr>
+          <p:nvPr>
+            <p:ph type="title"/>
+          </p:nvPr>
+        </p:nvSpPr>
+        <p:spPr/>
+        <p:txBody>
+          <a:bodyPr/>
+          <a:lstStyle/>
+          <a:p>
+            <a:pPr algn="l"/>
+            <a:r>
+              <a:rPr lang="en-US" dirty="0" smtClean="0"/>
+              <a:t>3. Add </a:t>
+            </a:r>
+            <a:r>
+              <a:rPr lang="en-US" dirty="0" smtClean="0"/>
+              <a:t>Maintainability Sensors</a:t>
+            </a:r>
+            <a:endParaRPr lang="en-US" dirty="0"/>
+          </a:p>
+        </p:txBody>
+      </p:sp>
+      <p:sp>
+        <p:nvSpPr>
+          <p:cNvPr id="3" name="Content Placeholder 2"/>
+          <p:cNvSpPr>
+            <a:spLocks noGrp="1"/>
+          </p:cNvSpPr>
+          <p:nvPr>
+            <p:ph idx="1"/>
+          </p:nvPr>
+        </p:nvSpPr>
+        <p:spPr/>
+        <p:txBody>
+          <a:bodyPr/>
+          <a:lstStyle/>
+          <a:p>
+            <a:r>
+              <a:rPr lang="en-US" sz="2400" dirty="0" smtClean="0">
+                <a:hlinkClick r:id="rId2"/>
+              </a:rPr>
+              <a:t>https://</a:t>
+            </a:r>
+            <a:r>
+              <a:rPr lang="en-US" sz="2400" dirty="0" smtClean="0">
+                <a:hlinkClick r:id="rId2"/>
+              </a:rPr>
+              <a:t>martinfowler.com/articles/sensors-for-coding-agents.html</a:t>
+            </a:r>
+            <a:endParaRPr lang="en-US" sz="2400" dirty="0" smtClean="0"/>
+          </a:p>
+          <a:p>
+            <a:r>
+              <a:rPr lang="en-US" sz="2400" dirty="0" smtClean="0">
+                <a:hlinkClick r:id="rId3"/>
+              </a:rPr>
+              <a:t>https://</a:t>
+            </a:r>
+            <a:r>
+              <a:rPr lang="en-US" sz="2400" dirty="0" smtClean="0">
+                <a:hlinkClick r:id="rId3"/>
+              </a:rPr>
+              <a:t>github.com/birgitta410/sensors-cli</a:t>
+            </a:r>
+            <a:endParaRPr lang="en-US" sz="2400" dirty="0" smtClean="0"/>
+          </a:p>
+          <a:p>
+            <a:r>
+              <a:rPr lang="en-US" sz="2400" dirty="0" smtClean="0"/>
+              <a:t>Internal quality problems affect AI agents in similar ways that they affect human </a:t>
+            </a:r>
+            <a:r>
+              <a:rPr lang="en-US" sz="2400" dirty="0" smtClean="0"/>
+              <a:t>developers.</a:t>
+            </a:r>
+          </a:p>
+          <a:p>
+            <a:r>
+              <a:rPr lang="en-US" sz="2400" dirty="0" smtClean="0"/>
+              <a:t>An </a:t>
+            </a:r>
+            <a:r>
+              <a:rPr lang="en-US" sz="2400" dirty="0" smtClean="0"/>
+              <a:t>agent working in a tangled codebase might look in the wrong place for an existing implementation, create inconsistencies because it has not noticed a duplicate, or be forced to load more context than a task should require.</a:t>
+            </a:r>
+            <a:endParaRPr lang="en-US" sz="2400" dirty="0" smtClean="0"/>
+          </a:p>
+          <a:p>
+            <a:endParaRPr lang="en-US" sz="2400" dirty="0"/>
+          </a:p>
+        </p:txBody>
+      </p:sp>
+    </p:spTree>
+  </p:cSld>
+  <p:clrMapOvr>
+    <a:masterClrMapping/>
+  </p:clrMapOvr>
+</p:sld>
+</file>
+
+<file path=ppt/slides/slide49.xml><?xml version="1.0" encoding="utf-8"?>
 <p:sld xmlns:a="http://schemas.openxmlformats.org/drawingml/2006/main" xmlns:r="http://schemas.openxmlformats.org/officeDocument/2006/relationships" xmlns:p="http://schemas.openxmlformats.org/presentationml/2006/main">
   <p:cSld>
     <p:spTree>
@@ -8146,165 +8250,6 @@
 </p:sld>
 </file>
 
-<file path=ppt/slides/slide49.xml><?xml version="1.0" encoding="utf-8"?>
-<p:sld xmlns:a="http://schemas.openxmlformats.org/drawingml/2006/main" xmlns:r="http://schemas.openxmlformats.org/officeDocument/2006/relationships" xmlns:p="http://schemas.openxmlformats.org/presentationml/2006/main">
-  <p:cSld>
-    <p:spTree>
-      <p:nvGrpSpPr>
-        <p:cNvPr id="1" name=""/>
-        <p:cNvGrpSpPr/>
-        <p:nvPr/>
-      </p:nvGrpSpPr>
-      <p:grpSpPr>
-        <a:xfrm>
-          <a:off x="0" y="0"/>
-          <a:ext cx="0" cy="0"/>
-          <a:chOff x="0" y="0"/>
-          <a:chExt cx="0" cy="0"/>
-        </a:xfrm>
-      </p:grpSpPr>
-      <p:sp>
-        <p:nvSpPr>
-          <p:cNvPr id="2" name="Title 1"/>
-          <p:cNvSpPr>
-            <a:spLocks noGrp="1"/>
-          </p:cNvSpPr>
-          <p:nvPr>
-            <p:ph type="title"/>
-          </p:nvPr>
-        </p:nvSpPr>
-        <p:spPr/>
-        <p:txBody>
-          <a:bodyPr/>
-          <a:lstStyle/>
-          <a:p>
-            <a:r>
-              <a:rPr lang="fr-FR" dirty="0" smtClean="0"/>
-              <a:t>Chat vs. </a:t>
-            </a:r>
-            <a:r>
-              <a:rPr lang="fr-FR" dirty="0" err="1" smtClean="0"/>
-              <a:t>Cowork</a:t>
-            </a:r>
-            <a:r>
-              <a:rPr lang="fr-FR" dirty="0" smtClean="0"/>
-              <a:t> vs. Claude Code</a:t>
-            </a:r>
-            <a:endParaRPr lang="en-US" dirty="0"/>
-          </a:p>
-        </p:txBody>
-      </p:sp>
-      <p:sp>
-        <p:nvSpPr>
-          <p:cNvPr id="3" name="Content Placeholder 2"/>
-          <p:cNvSpPr>
-            <a:spLocks noGrp="1"/>
-          </p:cNvSpPr>
-          <p:nvPr>
-            <p:ph idx="1"/>
-          </p:nvPr>
-        </p:nvSpPr>
-        <p:spPr/>
-        <p:txBody>
-          <a:bodyPr/>
-          <a:lstStyle/>
-          <a:p>
-            <a:r>
-              <a:rPr lang="en-US" sz="1800" i="1" dirty="0" smtClean="0">
-                <a:solidFill>
-                  <a:srgbClr val="C00000"/>
-                </a:solidFill>
-              </a:rPr>
-              <a:t>Chat</a:t>
-            </a:r>
-            <a:r>
-              <a:rPr lang="en-US" sz="1800" dirty="0" smtClean="0"/>
-              <a:t> is for quick questions, brainstorming, iterative drafting, and working through problems back and forth.</a:t>
-            </a:r>
-          </a:p>
-          <a:p>
-            <a:r>
-              <a:rPr lang="en-US" sz="1800" i="1" dirty="0" err="1" smtClean="0">
-                <a:solidFill>
-                  <a:srgbClr val="C00000"/>
-                </a:solidFill>
-              </a:rPr>
-              <a:t>Cowork</a:t>
-            </a:r>
-            <a:r>
-              <a:rPr lang="en-US" sz="1800" dirty="0" smtClean="0"/>
-              <a:t> is for complex or sustained work—research, analysis, and producing finished documents and deliverables—where Claude needs room to pull from multiple sources and see things through.</a:t>
-            </a:r>
-          </a:p>
-          <a:p>
-            <a:r>
-              <a:rPr lang="en-US" sz="1800" dirty="0" err="1" smtClean="0"/>
-              <a:t>Cowork</a:t>
-            </a:r>
-            <a:r>
-              <a:rPr lang="en-US" sz="1800" dirty="0" smtClean="0"/>
-              <a:t> = </a:t>
-            </a:r>
-            <a:r>
-              <a:rPr lang="en-US" sz="1800" i="1" dirty="0" smtClean="0">
-                <a:solidFill>
-                  <a:srgbClr val="C00000"/>
-                </a:solidFill>
-              </a:rPr>
-              <a:t>desktop app</a:t>
-            </a:r>
-            <a:r>
-              <a:rPr lang="en-US" sz="1800" dirty="0" smtClean="0"/>
-              <a:t> + local files + connectors + browser control + computer use + autonomous multi-step execution + scheduling + mobile dispatch. Mobile dispatch lets you kick off or steer a </a:t>
-            </a:r>
-            <a:r>
-              <a:rPr lang="en-US" sz="1800" dirty="0" err="1" smtClean="0"/>
-              <a:t>Cowork</a:t>
-            </a:r>
-            <a:r>
-              <a:rPr lang="en-US" sz="1800" dirty="0" smtClean="0"/>
-              <a:t> task from your phone, while the actual work runs on your desktop.</a:t>
-            </a:r>
-          </a:p>
-          <a:p>
-            <a:r>
-              <a:rPr lang="en-US" sz="1800" dirty="0" smtClean="0"/>
-              <a:t>Web chat answers questions turn-by-turn with your uploaded files and connectors, while </a:t>
-            </a:r>
-            <a:r>
-              <a:rPr lang="en-US" sz="1800" dirty="0" err="1" smtClean="0"/>
-              <a:t>Cowork</a:t>
-            </a:r>
-            <a:r>
-              <a:rPr lang="en-US" sz="1800" dirty="0" smtClean="0"/>
-              <a:t> takes a goal and autonomously executes multi-step work across your local files, apps, browser, and connectors on the desktop.</a:t>
-            </a:r>
-          </a:p>
-          <a:p>
-            <a:r>
-              <a:rPr lang="en-US" sz="1800" i="1" dirty="0" smtClean="0">
-                <a:solidFill>
-                  <a:srgbClr val="C00000"/>
-                </a:solidFill>
-              </a:rPr>
-              <a:t>Claude Code</a:t>
-            </a:r>
-            <a:r>
-              <a:rPr lang="en-US" sz="1800" dirty="0" smtClean="0"/>
-              <a:t> is for building software—writing, testing, running, and deploying code, with access to your file system and development tools.</a:t>
-            </a:r>
-            <a:endParaRPr lang="en-US" sz="1800" dirty="0"/>
-          </a:p>
-        </p:txBody>
-      </p:sp>
-    </p:spTree>
-  </p:cSld>
-  <p:clrMapOvr>
-    <a:masterClrMapping/>
-  </p:clrMapOvr>
-</p:sld>
-</file>
-
 <file path=ppt/slides/slide5.xml><?xml version="1.0" encoding="utf-8"?>
 <p:sld xmlns:a="http://schemas.openxmlformats.org/drawingml/2006/main" xmlns:r="http://schemas.openxmlformats.org/officeDocument/2006/relationships" xmlns:p="http://schemas.openxmlformats.org/presentationml/2006/main">
   <p:cSld>
@@ -8383,6 +8328,165 @@
 </file>
 
 <file path=ppt/slides/slide50.xml><?xml version="1.0" encoding="utf-8"?>
+<p:sld xmlns:a="http://schemas.openxmlformats.org/drawingml/2006/main" xmlns:r="http://schemas.openxmlformats.org/officeDocument/2006/relationships" xmlns:p="http://schemas.openxmlformats.org/presentationml/2006/main">
+  <p:cSld>
+    <p:spTree>
+      <p:nvGrpSpPr>
+        <p:cNvPr id="1" name=""/>
+        <p:cNvGrpSpPr/>
+        <p:nvPr/>
+      </p:nvGrpSpPr>
+      <p:grpSpPr>
+        <a:xfrm>
+          <a:off x="0" y="0"/>
+          <a:ext cx="0" cy="0"/>
+          <a:chOff x="0" y="0"/>
+          <a:chExt cx="0" cy="0"/>
+        </a:xfrm>
+      </p:grpSpPr>
+      <p:sp>
+        <p:nvSpPr>
+          <p:cNvPr id="2" name="Title 1"/>
+          <p:cNvSpPr>
+            <a:spLocks noGrp="1"/>
+          </p:cNvSpPr>
+          <p:nvPr>
+            <p:ph type="title"/>
+          </p:nvPr>
+        </p:nvSpPr>
+        <p:spPr/>
+        <p:txBody>
+          <a:bodyPr/>
+          <a:lstStyle/>
+          <a:p>
+            <a:r>
+              <a:rPr lang="fr-FR" dirty="0" smtClean="0"/>
+              <a:t>Chat vs. </a:t>
+            </a:r>
+            <a:r>
+              <a:rPr lang="fr-FR" dirty="0" err="1" smtClean="0"/>
+              <a:t>Cowork</a:t>
+            </a:r>
+            <a:r>
+              <a:rPr lang="fr-FR" dirty="0" smtClean="0"/>
+              <a:t> vs. Claude Code</a:t>
+            </a:r>
+            <a:endParaRPr lang="en-US" dirty="0"/>
+          </a:p>
+        </p:txBody>
+      </p:sp>
+      <p:sp>
+        <p:nvSpPr>
+          <p:cNvPr id="3" name="Content Placeholder 2"/>
+          <p:cNvSpPr>
+            <a:spLocks noGrp="1"/>
+          </p:cNvSpPr>
+          <p:nvPr>
+            <p:ph idx="1"/>
+          </p:nvPr>
+        </p:nvSpPr>
+        <p:spPr/>
+        <p:txBody>
+          <a:bodyPr/>
+          <a:lstStyle/>
+          <a:p>
+            <a:r>
+              <a:rPr lang="en-US" sz="1800" i="1" dirty="0" smtClean="0">
+                <a:solidFill>
+                  <a:srgbClr val="C00000"/>
+                </a:solidFill>
+              </a:rPr>
+              <a:t>Chat</a:t>
+            </a:r>
+            <a:r>
+              <a:rPr lang="en-US" sz="1800" dirty="0" smtClean="0"/>
+              <a:t> is for quick questions, brainstorming, iterative drafting, and working through problems back and forth.</a:t>
+            </a:r>
+          </a:p>
+          <a:p>
+            <a:r>
+              <a:rPr lang="en-US" sz="1800" i="1" dirty="0" err="1" smtClean="0">
+                <a:solidFill>
+                  <a:srgbClr val="C00000"/>
+                </a:solidFill>
+              </a:rPr>
+              <a:t>Cowork</a:t>
+            </a:r>
+            <a:r>
+              <a:rPr lang="en-US" sz="1800" dirty="0" smtClean="0"/>
+              <a:t> is for complex or sustained work—research, analysis, and producing finished documents and deliverables—where Claude needs room to pull from multiple sources and see things through.</a:t>
+            </a:r>
+          </a:p>
+          <a:p>
+            <a:r>
+              <a:rPr lang="en-US" sz="1800" dirty="0" err="1" smtClean="0"/>
+              <a:t>Cowork</a:t>
+            </a:r>
+            <a:r>
+              <a:rPr lang="en-US" sz="1800" dirty="0" smtClean="0"/>
+              <a:t> = </a:t>
+            </a:r>
+            <a:r>
+              <a:rPr lang="en-US" sz="1800" i="1" dirty="0" smtClean="0">
+                <a:solidFill>
+                  <a:srgbClr val="C00000"/>
+                </a:solidFill>
+              </a:rPr>
+              <a:t>desktop app</a:t>
+            </a:r>
+            <a:r>
+              <a:rPr lang="en-US" sz="1800" dirty="0" smtClean="0"/>
+              <a:t> + local files + connectors + browser control + computer use + autonomous multi-step execution + scheduling + mobile dispatch. Mobile dispatch lets you kick off or steer a </a:t>
+            </a:r>
+            <a:r>
+              <a:rPr lang="en-US" sz="1800" dirty="0" err="1" smtClean="0"/>
+              <a:t>Cowork</a:t>
+            </a:r>
+            <a:r>
+              <a:rPr lang="en-US" sz="1800" dirty="0" smtClean="0"/>
+              <a:t> task from your phone, while the actual work runs on your desktop.</a:t>
+            </a:r>
+          </a:p>
+          <a:p>
+            <a:r>
+              <a:rPr lang="en-US" sz="1800" dirty="0" smtClean="0"/>
+              <a:t>Web chat answers questions turn-by-turn with your uploaded files and connectors, while </a:t>
+            </a:r>
+            <a:r>
+              <a:rPr lang="en-US" sz="1800" dirty="0" err="1" smtClean="0"/>
+              <a:t>Cowork</a:t>
+            </a:r>
+            <a:r>
+              <a:rPr lang="en-US" sz="1800" dirty="0" smtClean="0"/>
+              <a:t> takes a goal and autonomously executes multi-step work across your local files, apps, browser, and connectors on the desktop.</a:t>
+            </a:r>
+          </a:p>
+          <a:p>
+            <a:r>
+              <a:rPr lang="en-US" sz="1800" i="1" dirty="0" smtClean="0">
+                <a:solidFill>
+                  <a:srgbClr val="C00000"/>
+                </a:solidFill>
+              </a:rPr>
+              <a:t>Claude Code</a:t>
+            </a:r>
+            <a:r>
+              <a:rPr lang="en-US" sz="1800" dirty="0" smtClean="0"/>
+              <a:t> is for building software—writing, testing, running, and deploying code, with access to your file system and development tools.</a:t>
+            </a:r>
+            <a:endParaRPr lang="en-US" sz="1800" dirty="0"/>
+          </a:p>
+        </p:txBody>
+      </p:sp>
+    </p:spTree>
+  </p:cSld>
+  <p:clrMapOvr>
+    <a:masterClrMapping/>
+  </p:clrMapOvr>
+</p:sld>
+</file>
+
+<file path=ppt/slides/slide51.xml><?xml version="1.0" encoding="utf-8"?>
 <p:sld xmlns:a="http://schemas.openxmlformats.org/drawingml/2006/main" xmlns:r="http://schemas.openxmlformats.org/officeDocument/2006/relationships" xmlns:p="http://schemas.openxmlformats.org/presentationml/2006/main">
   <p:cSld>
     <p:spTree>
@@ -8505,7 +8609,7 @@
 </p:sld>
 </file>
 
-<file path=ppt/slides/slide51.xml><?xml version="1.0" encoding="utf-8"?>
+<file path=ppt/slides/slide52.xml><?xml version="1.0" encoding="utf-8"?>
 <p:sld xmlns:a="http://schemas.openxmlformats.org/drawingml/2006/main" xmlns:r="http://schemas.openxmlformats.org/officeDocument/2006/relationships" xmlns:p="http://schemas.openxmlformats.org/presentationml/2006/main">
   <p:cSld>
     <p:spTree>
@@ -8582,7 +8686,7 @@
 </p:sld>
 </file>
 
-<file path=ppt/slides/slide52.xml><?xml version="1.0" encoding="utf-8"?>
+<file path=ppt/slides/slide53.xml><?xml version="1.0" encoding="utf-8"?>
 <p:sld xmlns:a="http://schemas.openxmlformats.org/drawingml/2006/main" xmlns:r="http://schemas.openxmlformats.org/officeDocument/2006/relationships" xmlns:p="http://schemas.openxmlformats.org/presentationml/2006/main">
   <p:cSld>
     <p:spTree>

--- a/Software Engineering Capstone/05.4. Claude Code.pptx
+++ b/Software Engineering Capstone/05.4. Claude Code.pptx
@@ -5,10 +5,10 @@
     <p:sldMasterId id="2147483708" r:id="rId1"/>
   </p:sldMasterIdLst>
   <p:notesMasterIdLst>
-    <p:notesMasterId r:id="rId55"/>
+    <p:notesMasterId r:id="rId56"/>
   </p:notesMasterIdLst>
   <p:handoutMasterIdLst>
-    <p:handoutMasterId r:id="rId56"/>
+    <p:handoutMasterId r:id="rId57"/>
   </p:handoutMasterIdLst>
   <p:sldIdLst>
     <p:sldId id="256" r:id="rId2"/>
@@ -19,51 +19,52 @@
     <p:sldId id="518" r:id="rId7"/>
     <p:sldId id="579" r:id="rId8"/>
     <p:sldId id="574" r:id="rId9"/>
-    <p:sldId id="573" r:id="rId10"/>
-    <p:sldId id="575" r:id="rId11"/>
-    <p:sldId id="527" r:id="rId12"/>
-    <p:sldId id="528" r:id="rId13"/>
-    <p:sldId id="529" r:id="rId14"/>
-    <p:sldId id="588" r:id="rId15"/>
-    <p:sldId id="540" r:id="rId16"/>
-    <p:sldId id="589" r:id="rId17"/>
-    <p:sldId id="539" r:id="rId18"/>
-    <p:sldId id="541" r:id="rId19"/>
-    <p:sldId id="592" r:id="rId20"/>
-    <p:sldId id="591" r:id="rId21"/>
-    <p:sldId id="543" r:id="rId22"/>
-    <p:sldId id="550" r:id="rId23"/>
-    <p:sldId id="551" r:id="rId24"/>
-    <p:sldId id="555" r:id="rId25"/>
-    <p:sldId id="548" r:id="rId26"/>
-    <p:sldId id="558" r:id="rId27"/>
-    <p:sldId id="562" r:id="rId28"/>
-    <p:sldId id="566" r:id="rId29"/>
-    <p:sldId id="561" r:id="rId30"/>
-    <p:sldId id="570" r:id="rId31"/>
-    <p:sldId id="593" r:id="rId32"/>
-    <p:sldId id="594" r:id="rId33"/>
-    <p:sldId id="595" r:id="rId34"/>
-    <p:sldId id="596" r:id="rId35"/>
-    <p:sldId id="597" r:id="rId36"/>
-    <p:sldId id="598" r:id="rId37"/>
-    <p:sldId id="599" r:id="rId38"/>
-    <p:sldId id="600" r:id="rId39"/>
-    <p:sldId id="602" r:id="rId40"/>
-    <p:sldId id="604" r:id="rId41"/>
-    <p:sldId id="603" r:id="rId42"/>
-    <p:sldId id="605" r:id="rId43"/>
-    <p:sldId id="606" r:id="rId44"/>
-    <p:sldId id="607" r:id="rId45"/>
-    <p:sldId id="601" r:id="rId46"/>
-    <p:sldId id="609" r:id="rId47"/>
-    <p:sldId id="611" r:id="rId48"/>
-    <p:sldId id="612" r:id="rId49"/>
-    <p:sldId id="608" r:id="rId50"/>
-    <p:sldId id="586" r:id="rId51"/>
-    <p:sldId id="583" r:id="rId52"/>
-    <p:sldId id="584" r:id="rId53"/>
-    <p:sldId id="343" r:id="rId54"/>
+    <p:sldId id="613" r:id="rId10"/>
+    <p:sldId id="573" r:id="rId11"/>
+    <p:sldId id="575" r:id="rId12"/>
+    <p:sldId id="527" r:id="rId13"/>
+    <p:sldId id="528" r:id="rId14"/>
+    <p:sldId id="529" r:id="rId15"/>
+    <p:sldId id="588" r:id="rId16"/>
+    <p:sldId id="540" r:id="rId17"/>
+    <p:sldId id="589" r:id="rId18"/>
+    <p:sldId id="539" r:id="rId19"/>
+    <p:sldId id="541" r:id="rId20"/>
+    <p:sldId id="592" r:id="rId21"/>
+    <p:sldId id="591" r:id="rId22"/>
+    <p:sldId id="543" r:id="rId23"/>
+    <p:sldId id="550" r:id="rId24"/>
+    <p:sldId id="551" r:id="rId25"/>
+    <p:sldId id="555" r:id="rId26"/>
+    <p:sldId id="548" r:id="rId27"/>
+    <p:sldId id="558" r:id="rId28"/>
+    <p:sldId id="562" r:id="rId29"/>
+    <p:sldId id="566" r:id="rId30"/>
+    <p:sldId id="561" r:id="rId31"/>
+    <p:sldId id="570" r:id="rId32"/>
+    <p:sldId id="593" r:id="rId33"/>
+    <p:sldId id="594" r:id="rId34"/>
+    <p:sldId id="595" r:id="rId35"/>
+    <p:sldId id="596" r:id="rId36"/>
+    <p:sldId id="597" r:id="rId37"/>
+    <p:sldId id="598" r:id="rId38"/>
+    <p:sldId id="599" r:id="rId39"/>
+    <p:sldId id="600" r:id="rId40"/>
+    <p:sldId id="602" r:id="rId41"/>
+    <p:sldId id="604" r:id="rId42"/>
+    <p:sldId id="603" r:id="rId43"/>
+    <p:sldId id="605" r:id="rId44"/>
+    <p:sldId id="606" r:id="rId45"/>
+    <p:sldId id="607" r:id="rId46"/>
+    <p:sldId id="601" r:id="rId47"/>
+    <p:sldId id="609" r:id="rId48"/>
+    <p:sldId id="611" r:id="rId49"/>
+    <p:sldId id="612" r:id="rId50"/>
+    <p:sldId id="608" r:id="rId51"/>
+    <p:sldId id="586" r:id="rId52"/>
+    <p:sldId id="583" r:id="rId53"/>
+    <p:sldId id="584" r:id="rId54"/>
+    <p:sldId id="343" r:id="rId55"/>
   </p:sldIdLst>
   <p:sldSz cx="9144000" cy="6858000" type="screen4x3"/>
   <p:notesSz cx="6858000" cy="9144000"/>
@@ -278,7 +279,7 @@
             <a:fld id="{50D0DBAB-D1C9-4D1B-A41F-EB0AC0278643}" type="datetimeFigureOut">
               <a:rPr lang="en-US" smtClean="0"/>
               <a:pPr/>
-              <a:t>7/13/2026</a:t>
+              <a:t>7/18/2026</a:t>
             </a:fld>
             <a:endParaRPr lang="en-US"/>
           </a:p>
@@ -440,7 +441,7 @@
             <a:fld id="{51300FB1-EAA8-41B6-84E0-C0BE923892D9}" type="datetimeFigureOut">
               <a:rPr lang="en-US" smtClean="0"/>
               <a:pPr/>
-              <a:t>7/13/2026</a:t>
+              <a:t>7/18/2026</a:t>
             </a:fld>
             <a:endParaRPr lang="en-US"/>
           </a:p>
@@ -897,7 +898,7 @@
               <a:pPr>
                 <a:defRPr/>
               </a:pPr>
-              <a:t>7/13/2026</a:t>
+              <a:t>7/18/2026</a:t>
             </a:fld>
             <a:endParaRPr lang="en-US"/>
           </a:p>
@@ -1089,7 +1090,7 @@
               <a:pPr>
                 <a:defRPr/>
               </a:pPr>
-              <a:t>7/13/2026</a:t>
+              <a:t>7/18/2026</a:t>
             </a:fld>
             <a:endParaRPr lang="en-US"/>
           </a:p>
@@ -1291,7 +1292,7 @@
               <a:pPr>
                 <a:defRPr/>
               </a:pPr>
-              <a:t>7/13/2026</a:t>
+              <a:t>7/18/2026</a:t>
             </a:fld>
             <a:endParaRPr lang="en-US"/>
           </a:p>
@@ -1483,7 +1484,7 @@
               <a:pPr>
                 <a:defRPr/>
               </a:pPr>
-              <a:t>7/13/2026</a:t>
+              <a:t>7/18/2026</a:t>
             </a:fld>
             <a:endParaRPr lang="en-US"/>
           </a:p>
@@ -1751,7 +1752,7 @@
               <a:pPr>
                 <a:defRPr/>
               </a:pPr>
-              <a:t>7/13/2026</a:t>
+              <a:t>7/18/2026</a:t>
             </a:fld>
             <a:endParaRPr lang="en-US"/>
           </a:p>
@@ -2061,7 +2062,7 @@
               <a:pPr>
                 <a:defRPr/>
               </a:pPr>
-              <a:t>7/13/2026</a:t>
+              <a:t>7/18/2026</a:t>
             </a:fld>
             <a:endParaRPr lang="en-US"/>
           </a:p>
@@ -2505,7 +2506,7 @@
               <a:pPr>
                 <a:defRPr/>
               </a:pPr>
-              <a:t>7/13/2026</a:t>
+              <a:t>7/18/2026</a:t>
             </a:fld>
             <a:endParaRPr lang="en-US"/>
           </a:p>
@@ -2645,7 +2646,7 @@
               <a:pPr>
                 <a:defRPr/>
               </a:pPr>
-              <a:t>7/13/2026</a:t>
+              <a:t>7/18/2026</a:t>
             </a:fld>
             <a:endParaRPr lang="en-US"/>
           </a:p>
@@ -2762,7 +2763,7 @@
               <a:pPr>
                 <a:defRPr/>
               </a:pPr>
-              <a:t>7/13/2026</a:t>
+              <a:t>7/18/2026</a:t>
             </a:fld>
             <a:endParaRPr lang="en-US"/>
           </a:p>
@@ -3061,7 +3062,7 @@
               <a:pPr>
                 <a:defRPr/>
               </a:pPr>
-              <a:t>7/13/2026</a:t>
+              <a:t>7/18/2026</a:t>
             </a:fld>
             <a:endParaRPr lang="en-US"/>
           </a:p>
@@ -3339,7 +3340,7 @@
               <a:pPr>
                 <a:defRPr/>
               </a:pPr>
-              <a:t>7/13/2026</a:t>
+              <a:t>7/18/2026</a:t>
             </a:fld>
             <a:endParaRPr lang="en-US"/>
           </a:p>
@@ -3587,7 +3588,7 @@
               <a:pPr>
                 <a:defRPr/>
               </a:pPr>
-              <a:t>7/13/2026</a:t>
+              <a:t>7/18/2026</a:t>
             </a:fld>
             <a:endParaRPr lang="en-US"/>
           </a:p>
@@ -4248,16 +4249,106 @@
           <a:chExt cx="0" cy="0"/>
         </a:xfrm>
       </p:grpSpPr>
+      <p:sp>
+        <p:nvSpPr>
+          <p:cNvPr id="2" name="Title 1"/>
+          <p:cNvSpPr>
+            <a:spLocks noGrp="1"/>
+          </p:cNvSpPr>
+          <p:nvPr>
+            <p:ph type="title"/>
+          </p:nvPr>
+        </p:nvSpPr>
+        <p:spPr/>
+        <p:txBody>
+          <a:bodyPr/>
+          <a:lstStyle/>
+          <a:p>
+            <a:pPr algn="l"/>
+            <a:r>
+              <a:rPr lang="en-US" smtClean="0"/>
+              <a:t>6. </a:t>
+            </a:r>
+            <a:r>
+              <a:rPr lang="en-US" dirty="0" smtClean="0"/>
+              <a:t>Install Claude Code on </a:t>
+            </a:r>
+            <a:r>
+              <a:rPr lang="en-US" dirty="0" err="1" smtClean="0"/>
+              <a:t>macOS</a:t>
+            </a:r>
+            <a:endParaRPr lang="en-US" dirty="0"/>
+          </a:p>
+        </p:txBody>
+      </p:sp>
+      <p:sp>
+        <p:nvSpPr>
+          <p:cNvPr id="3" name="Content Placeholder 2"/>
+          <p:cNvSpPr>
+            <a:spLocks noGrp="1"/>
+          </p:cNvSpPr>
+          <p:nvPr>
+            <p:ph idx="1"/>
+          </p:nvPr>
+        </p:nvSpPr>
+        <p:spPr/>
+        <p:txBody>
+          <a:bodyPr/>
+          <a:lstStyle/>
+          <a:p>
+            <a:r>
+              <a:rPr lang="en-US" sz="2200" dirty="0" smtClean="0">
+                <a:hlinkClick r:id="rId2"/>
+              </a:rPr>
+              <a:t>https://code.claude.com/docs/en/quickstart</a:t>
+            </a:r>
+            <a:endParaRPr lang="en-US" sz="2200" dirty="0" smtClean="0"/>
+          </a:p>
+          <a:p>
+            <a:r>
+              <a:rPr lang="en-US" sz="2200" dirty="0" smtClean="0"/>
+              <a:t>curl -</a:t>
+            </a:r>
+            <a:r>
+              <a:rPr lang="en-US" sz="2200" dirty="0" err="1" smtClean="0"/>
+              <a:t>fsSL</a:t>
+            </a:r>
+            <a:r>
+              <a:rPr lang="en-US" sz="2200" dirty="0" smtClean="0"/>
+              <a:t> https://claude.ai/install.sh | bash</a:t>
+            </a:r>
+          </a:p>
+          <a:p>
+            <a:r>
+              <a:rPr lang="en-US" sz="2200" dirty="0" smtClean="0"/>
+              <a:t>echo 'export PATH="$HOME/.local/bin:$PATH"' &gt;&gt; ~/.</a:t>
+            </a:r>
+            <a:r>
+              <a:rPr lang="en-US" sz="2200" dirty="0" err="1" smtClean="0"/>
+              <a:t>zshrc</a:t>
+            </a:r>
+            <a:r>
+              <a:rPr lang="en-US" sz="2200" dirty="0" smtClean="0"/>
+              <a:t> &amp;&amp; source ~/.</a:t>
+            </a:r>
+            <a:r>
+              <a:rPr lang="en-US" sz="2200" dirty="0" err="1" smtClean="0"/>
+              <a:t>zshrc</a:t>
+            </a:r>
+            <a:endParaRPr lang="en-US" sz="2200" dirty="0" smtClean="0"/>
+          </a:p>
+        </p:txBody>
+      </p:sp>
       <p:pic>
         <p:nvPicPr>
-          <p:cNvPr id="4" name="Picture 2" descr="https://lh3.ggpht.com/1IfZLL2QDSjZ0wS7sUhaMlsAOS8BBzdR3wZ1WawgRn7KZAM8nEVZYMOUM-lqQb0ikIzp=w300"/>
+          <p:cNvPr id="1026" name="Picture 2"/>
           <p:cNvPicPr>
             <a:picLocks noChangeAspect="1" noChangeArrowheads="1"/>
           </p:cNvPicPr>
           <p:nvPr/>
         </p:nvPicPr>
         <p:blipFill>
-          <a:blip r:embed="rId2" cstate="print"/>
+          <a:blip r:embed="rId3" cstate="print"/>
           <a:srcRect/>
           <a:stretch>
             <a:fillRect/>
@@ -4265,190 +4356,8 @@
         </p:blipFill>
         <p:spPr bwMode="auto">
           <a:xfrm>
-            <a:off x="3276600" y="1905000"/>
-            <a:ext cx="2857500" cy="2857500"/>
-          </a:xfrm>
-          <a:prstGeom prst="rect">
-            <a:avLst/>
-          </a:prstGeom>
-          <a:noFill/>
-        </p:spPr>
-      </p:pic>
-    </p:spTree>
-  </p:cSld>
-  <p:clrMapOvr>
-    <a:masterClrMapping/>
-  </p:clrMapOvr>
-</p:sld>
-</file>
-
-<file path=ppt/slides/slide11.xml><?xml version="1.0" encoding="utf-8"?>
-<p:sld xmlns:a="http://schemas.openxmlformats.org/drawingml/2006/main" xmlns:r="http://schemas.openxmlformats.org/officeDocument/2006/relationships" xmlns:p="http://schemas.openxmlformats.org/presentationml/2006/main">
-  <p:cSld>
-    <p:spTree>
-      <p:nvGrpSpPr>
-        <p:cNvPr id="1" name=""/>
-        <p:cNvGrpSpPr/>
-        <p:nvPr/>
-      </p:nvGrpSpPr>
-      <p:grpSpPr>
-        <a:xfrm>
-          <a:off x="0" y="0"/>
-          <a:ext cx="0" cy="0"/>
-          <a:chOff x="0" y="0"/>
-          <a:chExt cx="0" cy="0"/>
-        </a:xfrm>
-      </p:grpSpPr>
-      <p:sp>
-        <p:nvSpPr>
-          <p:cNvPr id="2" name="Title 1"/>
-          <p:cNvSpPr>
-            <a:spLocks noGrp="1"/>
-          </p:cNvSpPr>
-          <p:nvPr>
-            <p:ph type="title"/>
-          </p:nvPr>
-        </p:nvSpPr>
-        <p:spPr/>
-        <p:txBody>
-          <a:bodyPr/>
-          <a:lstStyle/>
-          <a:p>
-            <a:pPr algn="l"/>
-            <a:r>
-              <a:rPr lang="en-US" dirty="0" smtClean="0"/>
-              <a:t>1. Open Claude Code</a:t>
-            </a:r>
-            <a:endParaRPr lang="en-US" dirty="0"/>
-          </a:p>
-        </p:txBody>
-      </p:sp>
-      <p:sp>
-        <p:nvSpPr>
-          <p:cNvPr id="3" name="Content Placeholder 2"/>
-          <p:cNvSpPr>
-            <a:spLocks noGrp="1"/>
-          </p:cNvSpPr>
-          <p:nvPr>
-            <p:ph idx="1"/>
-          </p:nvPr>
-        </p:nvSpPr>
-        <p:spPr/>
-        <p:txBody>
-          <a:bodyPr/>
-          <a:lstStyle/>
-          <a:p>
-            <a:r>
-              <a:rPr lang="en-US" dirty="0" err="1" smtClean="0"/>
-              <a:t>cd</a:t>
-            </a:r>
-            <a:r>
-              <a:rPr lang="en-US" dirty="0" smtClean="0"/>
-              <a:t> C:\Users\admin\Downloads\inventory</a:t>
-            </a:r>
-          </a:p>
-          <a:p>
-            <a:r>
-              <a:rPr lang="en-US" dirty="0" err="1" smtClean="0"/>
-              <a:t>claude</a:t>
-            </a:r>
-            <a:endParaRPr lang="en-US" dirty="0"/>
-          </a:p>
-        </p:txBody>
-      </p:sp>
-    </p:spTree>
-  </p:cSld>
-  <p:clrMapOvr>
-    <a:masterClrMapping/>
-  </p:clrMapOvr>
-</p:sld>
-</file>
-
-<file path=ppt/slides/slide12.xml><?xml version="1.0" encoding="utf-8"?>
-<p:sld xmlns:a="http://schemas.openxmlformats.org/drawingml/2006/main" xmlns:r="http://schemas.openxmlformats.org/officeDocument/2006/relationships" xmlns:p="http://schemas.openxmlformats.org/presentationml/2006/main">
-  <p:cSld>
-    <p:spTree>
-      <p:nvGrpSpPr>
-        <p:cNvPr id="1" name=""/>
-        <p:cNvGrpSpPr/>
-        <p:nvPr/>
-      </p:nvGrpSpPr>
-      <p:grpSpPr>
-        <a:xfrm>
-          <a:off x="0" y="0"/>
-          <a:ext cx="0" cy="0"/>
-          <a:chOff x="0" y="0"/>
-          <a:chExt cx="0" cy="0"/>
-        </a:xfrm>
-      </p:grpSpPr>
-      <p:sp>
-        <p:nvSpPr>
-          <p:cNvPr id="2" name="Title 1"/>
-          <p:cNvSpPr>
-            <a:spLocks noGrp="1"/>
-          </p:cNvSpPr>
-          <p:nvPr>
-            <p:ph type="title"/>
-          </p:nvPr>
-        </p:nvSpPr>
-        <p:spPr/>
-        <p:txBody>
-          <a:bodyPr/>
-          <a:lstStyle/>
-          <a:p>
-            <a:pPr algn="l"/>
-            <a:r>
-              <a:rPr lang="en-US" dirty="0" smtClean="0"/>
-              <a:t>2. Ask a Question</a:t>
-            </a:r>
-            <a:endParaRPr lang="en-US" dirty="0"/>
-          </a:p>
-        </p:txBody>
-      </p:sp>
-      <p:sp>
-        <p:nvSpPr>
-          <p:cNvPr id="3" name="Content Placeholder 2"/>
-          <p:cNvSpPr>
-            <a:spLocks noGrp="1"/>
-          </p:cNvSpPr>
-          <p:nvPr>
-            <p:ph idx="1"/>
-          </p:nvPr>
-        </p:nvSpPr>
-        <p:spPr/>
-        <p:txBody>
-          <a:bodyPr/>
-          <a:lstStyle/>
-          <a:p>
-            <a:r>
-              <a:rPr lang="en-US" dirty="0" smtClean="0"/>
-              <a:t>what does this project do?</a:t>
-            </a:r>
-          </a:p>
-          <a:p>
-            <a:endParaRPr lang="en-US" dirty="0"/>
-          </a:p>
-        </p:txBody>
-      </p:sp>
-      <p:pic>
-        <p:nvPicPr>
-          <p:cNvPr id="4099" name="Picture 3"/>
-          <p:cNvPicPr>
-            <a:picLocks noChangeAspect="1" noChangeArrowheads="1"/>
-          </p:cNvPicPr>
-          <p:nvPr/>
-        </p:nvPicPr>
-        <p:blipFill>
-          <a:blip r:embed="rId2" cstate="print"/>
-          <a:srcRect/>
-          <a:stretch>
-            <a:fillRect/>
-          </a:stretch>
-        </p:blipFill>
-        <p:spPr bwMode="auto">
-          <a:xfrm>
-            <a:off x="1373188" y="2540000"/>
-            <a:ext cx="6397625" cy="2413000"/>
+            <a:off x="1616075" y="3397250"/>
+            <a:ext cx="5911850" cy="2851150"/>
           </a:xfrm>
           <a:prstGeom prst="rect">
             <a:avLst/>
@@ -4470,192 +4379,7 @@
 </p:sld>
 </file>
 
-<file path=ppt/slides/slide13.xml><?xml version="1.0" encoding="utf-8"?>
-<p:sld xmlns:a="http://schemas.openxmlformats.org/drawingml/2006/main" xmlns:r="http://schemas.openxmlformats.org/officeDocument/2006/relationships" xmlns:p="http://schemas.openxmlformats.org/presentationml/2006/main">
-  <p:cSld>
-    <p:spTree>
-      <p:nvGrpSpPr>
-        <p:cNvPr id="1" name=""/>
-        <p:cNvGrpSpPr/>
-        <p:nvPr/>
-      </p:nvGrpSpPr>
-      <p:grpSpPr>
-        <a:xfrm>
-          <a:off x="0" y="0"/>
-          <a:ext cx="0" cy="0"/>
-          <a:chOff x="0" y="0"/>
-          <a:chExt cx="0" cy="0"/>
-        </a:xfrm>
-      </p:grpSpPr>
-      <p:sp>
-        <p:nvSpPr>
-          <p:cNvPr id="2" name="Title 1"/>
-          <p:cNvSpPr>
-            <a:spLocks noGrp="1"/>
-          </p:cNvSpPr>
-          <p:nvPr>
-            <p:ph type="title"/>
-          </p:nvPr>
-        </p:nvSpPr>
-        <p:spPr/>
-        <p:txBody>
-          <a:bodyPr/>
-          <a:lstStyle/>
-          <a:p>
-            <a:pPr algn="l"/>
-            <a:r>
-              <a:rPr lang="en-US" dirty="0" smtClean="0"/>
-              <a:t>3. Add a Feature</a:t>
-            </a:r>
-            <a:endParaRPr lang="en-US" dirty="0"/>
-          </a:p>
-        </p:txBody>
-      </p:sp>
-      <p:sp>
-        <p:nvSpPr>
-          <p:cNvPr id="3" name="Content Placeholder 2"/>
-          <p:cNvSpPr>
-            <a:spLocks noGrp="1"/>
-          </p:cNvSpPr>
-          <p:nvPr>
-            <p:ph idx="1"/>
-          </p:nvPr>
-        </p:nvSpPr>
-        <p:spPr/>
-        <p:txBody>
-          <a:bodyPr/>
-          <a:lstStyle/>
-          <a:p>
-            <a:r>
-              <a:rPr lang="en-US" dirty="0" smtClean="0"/>
-              <a:t>create UI for the login feature.</a:t>
-            </a:r>
-            <a:endParaRPr lang="en-US" dirty="0"/>
-          </a:p>
-        </p:txBody>
-      </p:sp>
-    </p:spTree>
-  </p:cSld>
-  <p:clrMapOvr>
-    <a:masterClrMapping/>
-  </p:clrMapOvr>
-</p:sld>
-</file>
-
-<file path=ppt/slides/slide14.xml><?xml version="1.0" encoding="utf-8"?>
-<p:sld xmlns:a="http://schemas.openxmlformats.org/drawingml/2006/main" xmlns:r="http://schemas.openxmlformats.org/officeDocument/2006/relationships" xmlns:p="http://schemas.openxmlformats.org/presentationml/2006/main">
-  <p:cSld>
-    <p:spTree>
-      <p:nvGrpSpPr>
-        <p:cNvPr id="1" name=""/>
-        <p:cNvGrpSpPr/>
-        <p:nvPr/>
-      </p:nvGrpSpPr>
-      <p:grpSpPr>
-        <a:xfrm>
-          <a:off x="0" y="0"/>
-          <a:ext cx="0" cy="0"/>
-          <a:chOff x="0" y="0"/>
-          <a:chExt cx="0" cy="0"/>
-        </a:xfrm>
-      </p:grpSpPr>
-      <p:sp>
-        <p:nvSpPr>
-          <p:cNvPr id="2" name="Title 1"/>
-          <p:cNvSpPr>
-            <a:spLocks noGrp="1"/>
-          </p:cNvSpPr>
-          <p:nvPr>
-            <p:ph type="title"/>
-          </p:nvPr>
-        </p:nvSpPr>
-        <p:spPr/>
-        <p:txBody>
-          <a:bodyPr/>
-          <a:lstStyle/>
-          <a:p>
-            <a:pPr algn="l"/>
-            <a:r>
-              <a:rPr lang="en-US" dirty="0" smtClean="0"/>
-              <a:t>4. Log out Claude Code</a:t>
-            </a:r>
-            <a:endParaRPr lang="en-US" dirty="0"/>
-          </a:p>
-        </p:txBody>
-      </p:sp>
-      <p:sp>
-        <p:nvSpPr>
-          <p:cNvPr id="3" name="Content Placeholder 2"/>
-          <p:cNvSpPr>
-            <a:spLocks noGrp="1"/>
-          </p:cNvSpPr>
-          <p:nvPr>
-            <p:ph idx="1"/>
-          </p:nvPr>
-        </p:nvSpPr>
-        <p:spPr/>
-        <p:txBody>
-          <a:bodyPr/>
-          <a:lstStyle/>
-          <a:p>
-            <a:r>
-              <a:rPr lang="en-US" dirty="0" err="1" smtClean="0"/>
-              <a:t>claude</a:t>
-            </a:r>
-            <a:endParaRPr lang="en-US" dirty="0" smtClean="0"/>
-          </a:p>
-          <a:p>
-            <a:r>
-              <a:rPr lang="en-US" dirty="0" smtClean="0"/>
-              <a:t>/logout</a:t>
-            </a:r>
-          </a:p>
-          <a:p>
-            <a:endParaRPr lang="en-US" dirty="0"/>
-          </a:p>
-        </p:txBody>
-      </p:sp>
-      <p:pic>
-        <p:nvPicPr>
-          <p:cNvPr id="5122" name="Picture 2"/>
-          <p:cNvPicPr>
-            <a:picLocks noChangeAspect="1" noChangeArrowheads="1"/>
-          </p:cNvPicPr>
-          <p:nvPr/>
-        </p:nvPicPr>
-        <p:blipFill>
-          <a:blip r:embed="rId2" cstate="print"/>
-          <a:srcRect/>
-          <a:stretch>
-            <a:fillRect/>
-          </a:stretch>
-        </p:blipFill>
-        <p:spPr bwMode="auto">
-          <a:xfrm>
-            <a:off x="1524000" y="3276600"/>
-            <a:ext cx="6029325" cy="1581150"/>
-          </a:xfrm>
-          <a:prstGeom prst="rect">
-            <a:avLst/>
-          </a:prstGeom>
-          <a:noFill/>
-          <a:ln w="9525">
-            <a:noFill/>
-            <a:miter lim="800000"/>
-            <a:headEnd/>
-            <a:tailEnd/>
-          </a:ln>
-        </p:spPr>
-      </p:pic>
-    </p:spTree>
-  </p:cSld>
-  <p:clrMapOvr>
-    <a:masterClrMapping/>
-  </p:clrMapOvr>
-</p:sld>
-</file>
-
-<file path=ppt/slides/slide15.xml><?xml version="1.0" encoding="utf-8"?>
+<file path=ppt/slides/slide11.xml><?xml version="1.0" encoding="utf-8"?>
 <p:sld xmlns:a="http://schemas.openxmlformats.org/drawingml/2006/main" xmlns:r="http://schemas.openxmlformats.org/officeDocument/2006/relationships" xmlns:p="http://schemas.openxmlformats.org/presentationml/2006/main">
   <p:cSld>
     <p:spTree>
@@ -4706,7 +4430,431 @@
 </p:sld>
 </file>
 
+<file path=ppt/slides/slide12.xml><?xml version="1.0" encoding="utf-8"?>
+<p:sld xmlns:a="http://schemas.openxmlformats.org/drawingml/2006/main" xmlns:r="http://schemas.openxmlformats.org/officeDocument/2006/relationships" xmlns:p="http://schemas.openxmlformats.org/presentationml/2006/main">
+  <p:cSld>
+    <p:spTree>
+      <p:nvGrpSpPr>
+        <p:cNvPr id="1" name=""/>
+        <p:cNvGrpSpPr/>
+        <p:nvPr/>
+      </p:nvGrpSpPr>
+      <p:grpSpPr>
+        <a:xfrm>
+          <a:off x="0" y="0"/>
+          <a:ext cx="0" cy="0"/>
+          <a:chOff x="0" y="0"/>
+          <a:chExt cx="0" cy="0"/>
+        </a:xfrm>
+      </p:grpSpPr>
+      <p:sp>
+        <p:nvSpPr>
+          <p:cNvPr id="2" name="Title 1"/>
+          <p:cNvSpPr>
+            <a:spLocks noGrp="1"/>
+          </p:cNvSpPr>
+          <p:nvPr>
+            <p:ph type="title"/>
+          </p:nvPr>
+        </p:nvSpPr>
+        <p:spPr/>
+        <p:txBody>
+          <a:bodyPr/>
+          <a:lstStyle/>
+          <a:p>
+            <a:pPr algn="l"/>
+            <a:r>
+              <a:rPr lang="en-US" dirty="0" smtClean="0"/>
+              <a:t>1. Open Claude Code</a:t>
+            </a:r>
+            <a:endParaRPr lang="en-US" dirty="0"/>
+          </a:p>
+        </p:txBody>
+      </p:sp>
+      <p:sp>
+        <p:nvSpPr>
+          <p:cNvPr id="3" name="Content Placeholder 2"/>
+          <p:cNvSpPr>
+            <a:spLocks noGrp="1"/>
+          </p:cNvSpPr>
+          <p:nvPr>
+            <p:ph idx="1"/>
+          </p:nvPr>
+        </p:nvSpPr>
+        <p:spPr/>
+        <p:txBody>
+          <a:bodyPr/>
+          <a:lstStyle/>
+          <a:p>
+            <a:r>
+              <a:rPr lang="en-US" dirty="0" err="1" smtClean="0"/>
+              <a:t>cd</a:t>
+            </a:r>
+            <a:r>
+              <a:rPr lang="en-US" dirty="0" smtClean="0"/>
+              <a:t> C:\Users\admin\Downloads\inventory</a:t>
+            </a:r>
+          </a:p>
+          <a:p>
+            <a:r>
+              <a:rPr lang="en-US" dirty="0" err="1" smtClean="0"/>
+              <a:t>claude</a:t>
+            </a:r>
+            <a:endParaRPr lang="en-US" dirty="0"/>
+          </a:p>
+        </p:txBody>
+      </p:sp>
+    </p:spTree>
+  </p:cSld>
+  <p:clrMapOvr>
+    <a:masterClrMapping/>
+  </p:clrMapOvr>
+</p:sld>
+</file>
+
+<file path=ppt/slides/slide13.xml><?xml version="1.0" encoding="utf-8"?>
+<p:sld xmlns:a="http://schemas.openxmlformats.org/drawingml/2006/main" xmlns:r="http://schemas.openxmlformats.org/officeDocument/2006/relationships" xmlns:p="http://schemas.openxmlformats.org/presentationml/2006/main">
+  <p:cSld>
+    <p:spTree>
+      <p:nvGrpSpPr>
+        <p:cNvPr id="1" name=""/>
+        <p:cNvGrpSpPr/>
+        <p:nvPr/>
+      </p:nvGrpSpPr>
+      <p:grpSpPr>
+        <a:xfrm>
+          <a:off x="0" y="0"/>
+          <a:ext cx="0" cy="0"/>
+          <a:chOff x="0" y="0"/>
+          <a:chExt cx="0" cy="0"/>
+        </a:xfrm>
+      </p:grpSpPr>
+      <p:sp>
+        <p:nvSpPr>
+          <p:cNvPr id="2" name="Title 1"/>
+          <p:cNvSpPr>
+            <a:spLocks noGrp="1"/>
+          </p:cNvSpPr>
+          <p:nvPr>
+            <p:ph type="title"/>
+          </p:nvPr>
+        </p:nvSpPr>
+        <p:spPr/>
+        <p:txBody>
+          <a:bodyPr/>
+          <a:lstStyle/>
+          <a:p>
+            <a:pPr algn="l"/>
+            <a:r>
+              <a:rPr lang="en-US" dirty="0" smtClean="0"/>
+              <a:t>2. Ask a Question</a:t>
+            </a:r>
+            <a:endParaRPr lang="en-US" dirty="0"/>
+          </a:p>
+        </p:txBody>
+      </p:sp>
+      <p:sp>
+        <p:nvSpPr>
+          <p:cNvPr id="3" name="Content Placeholder 2"/>
+          <p:cNvSpPr>
+            <a:spLocks noGrp="1"/>
+          </p:cNvSpPr>
+          <p:nvPr>
+            <p:ph idx="1"/>
+          </p:nvPr>
+        </p:nvSpPr>
+        <p:spPr/>
+        <p:txBody>
+          <a:bodyPr/>
+          <a:lstStyle/>
+          <a:p>
+            <a:r>
+              <a:rPr lang="en-US" dirty="0" smtClean="0"/>
+              <a:t>what does this project do?</a:t>
+            </a:r>
+          </a:p>
+          <a:p>
+            <a:endParaRPr lang="en-US" dirty="0"/>
+          </a:p>
+        </p:txBody>
+      </p:sp>
+      <p:pic>
+        <p:nvPicPr>
+          <p:cNvPr id="4099" name="Picture 3"/>
+          <p:cNvPicPr>
+            <a:picLocks noChangeAspect="1" noChangeArrowheads="1"/>
+          </p:cNvPicPr>
+          <p:nvPr/>
+        </p:nvPicPr>
+        <p:blipFill>
+          <a:blip r:embed="rId2" cstate="print"/>
+          <a:srcRect/>
+          <a:stretch>
+            <a:fillRect/>
+          </a:stretch>
+        </p:blipFill>
+        <p:spPr bwMode="auto">
+          <a:xfrm>
+            <a:off x="1373188" y="2540000"/>
+            <a:ext cx="6397625" cy="2413000"/>
+          </a:xfrm>
+          <a:prstGeom prst="rect">
+            <a:avLst/>
+          </a:prstGeom>
+          <a:noFill/>
+          <a:ln w="9525">
+            <a:noFill/>
+            <a:miter lim="800000"/>
+            <a:headEnd/>
+            <a:tailEnd/>
+          </a:ln>
+        </p:spPr>
+      </p:pic>
+    </p:spTree>
+  </p:cSld>
+  <p:clrMapOvr>
+    <a:masterClrMapping/>
+  </p:clrMapOvr>
+</p:sld>
+</file>
+
+<file path=ppt/slides/slide14.xml><?xml version="1.0" encoding="utf-8"?>
+<p:sld xmlns:a="http://schemas.openxmlformats.org/drawingml/2006/main" xmlns:r="http://schemas.openxmlformats.org/officeDocument/2006/relationships" xmlns:p="http://schemas.openxmlformats.org/presentationml/2006/main">
+  <p:cSld>
+    <p:spTree>
+      <p:nvGrpSpPr>
+        <p:cNvPr id="1" name=""/>
+        <p:cNvGrpSpPr/>
+        <p:nvPr/>
+      </p:nvGrpSpPr>
+      <p:grpSpPr>
+        <a:xfrm>
+          <a:off x="0" y="0"/>
+          <a:ext cx="0" cy="0"/>
+          <a:chOff x="0" y="0"/>
+          <a:chExt cx="0" cy="0"/>
+        </a:xfrm>
+      </p:grpSpPr>
+      <p:sp>
+        <p:nvSpPr>
+          <p:cNvPr id="2" name="Title 1"/>
+          <p:cNvSpPr>
+            <a:spLocks noGrp="1"/>
+          </p:cNvSpPr>
+          <p:nvPr>
+            <p:ph type="title"/>
+          </p:nvPr>
+        </p:nvSpPr>
+        <p:spPr/>
+        <p:txBody>
+          <a:bodyPr/>
+          <a:lstStyle/>
+          <a:p>
+            <a:pPr algn="l"/>
+            <a:r>
+              <a:rPr lang="en-US" dirty="0" smtClean="0"/>
+              <a:t>3. Add a Feature</a:t>
+            </a:r>
+            <a:endParaRPr lang="en-US" dirty="0"/>
+          </a:p>
+        </p:txBody>
+      </p:sp>
+      <p:sp>
+        <p:nvSpPr>
+          <p:cNvPr id="3" name="Content Placeholder 2"/>
+          <p:cNvSpPr>
+            <a:spLocks noGrp="1"/>
+          </p:cNvSpPr>
+          <p:nvPr>
+            <p:ph idx="1"/>
+          </p:nvPr>
+        </p:nvSpPr>
+        <p:spPr/>
+        <p:txBody>
+          <a:bodyPr/>
+          <a:lstStyle/>
+          <a:p>
+            <a:r>
+              <a:rPr lang="en-US" dirty="0" smtClean="0"/>
+              <a:t>create UI for the login feature.</a:t>
+            </a:r>
+            <a:endParaRPr lang="en-US" dirty="0"/>
+          </a:p>
+        </p:txBody>
+      </p:sp>
+    </p:spTree>
+  </p:cSld>
+  <p:clrMapOvr>
+    <a:masterClrMapping/>
+  </p:clrMapOvr>
+</p:sld>
+</file>
+
+<file path=ppt/slides/slide15.xml><?xml version="1.0" encoding="utf-8"?>
+<p:sld xmlns:a="http://schemas.openxmlformats.org/drawingml/2006/main" xmlns:r="http://schemas.openxmlformats.org/officeDocument/2006/relationships" xmlns:p="http://schemas.openxmlformats.org/presentationml/2006/main">
+  <p:cSld>
+    <p:spTree>
+      <p:nvGrpSpPr>
+        <p:cNvPr id="1" name=""/>
+        <p:cNvGrpSpPr/>
+        <p:nvPr/>
+      </p:nvGrpSpPr>
+      <p:grpSpPr>
+        <a:xfrm>
+          <a:off x="0" y="0"/>
+          <a:ext cx="0" cy="0"/>
+          <a:chOff x="0" y="0"/>
+          <a:chExt cx="0" cy="0"/>
+        </a:xfrm>
+      </p:grpSpPr>
+      <p:sp>
+        <p:nvSpPr>
+          <p:cNvPr id="2" name="Title 1"/>
+          <p:cNvSpPr>
+            <a:spLocks noGrp="1"/>
+          </p:cNvSpPr>
+          <p:nvPr>
+            <p:ph type="title"/>
+          </p:nvPr>
+        </p:nvSpPr>
+        <p:spPr/>
+        <p:txBody>
+          <a:bodyPr/>
+          <a:lstStyle/>
+          <a:p>
+            <a:pPr algn="l"/>
+            <a:r>
+              <a:rPr lang="en-US" dirty="0" smtClean="0"/>
+              <a:t>4. Log out Claude Code</a:t>
+            </a:r>
+            <a:endParaRPr lang="en-US" dirty="0"/>
+          </a:p>
+        </p:txBody>
+      </p:sp>
+      <p:sp>
+        <p:nvSpPr>
+          <p:cNvPr id="3" name="Content Placeholder 2"/>
+          <p:cNvSpPr>
+            <a:spLocks noGrp="1"/>
+          </p:cNvSpPr>
+          <p:nvPr>
+            <p:ph idx="1"/>
+          </p:nvPr>
+        </p:nvSpPr>
+        <p:spPr/>
+        <p:txBody>
+          <a:bodyPr/>
+          <a:lstStyle/>
+          <a:p>
+            <a:r>
+              <a:rPr lang="en-US" dirty="0" err="1" smtClean="0"/>
+              <a:t>claude</a:t>
+            </a:r>
+            <a:endParaRPr lang="en-US" dirty="0" smtClean="0"/>
+          </a:p>
+          <a:p>
+            <a:r>
+              <a:rPr lang="en-US" dirty="0" smtClean="0"/>
+              <a:t>/logout</a:t>
+            </a:r>
+          </a:p>
+          <a:p>
+            <a:endParaRPr lang="en-US" dirty="0"/>
+          </a:p>
+        </p:txBody>
+      </p:sp>
+      <p:pic>
+        <p:nvPicPr>
+          <p:cNvPr id="5122" name="Picture 2"/>
+          <p:cNvPicPr>
+            <a:picLocks noChangeAspect="1" noChangeArrowheads="1"/>
+          </p:cNvPicPr>
+          <p:nvPr/>
+        </p:nvPicPr>
+        <p:blipFill>
+          <a:blip r:embed="rId2" cstate="print"/>
+          <a:srcRect/>
+          <a:stretch>
+            <a:fillRect/>
+          </a:stretch>
+        </p:blipFill>
+        <p:spPr bwMode="auto">
+          <a:xfrm>
+            <a:off x="1524000" y="3276600"/>
+            <a:ext cx="6029325" cy="1581150"/>
+          </a:xfrm>
+          <a:prstGeom prst="rect">
+            <a:avLst/>
+          </a:prstGeom>
+          <a:noFill/>
+          <a:ln w="9525">
+            <a:noFill/>
+            <a:miter lim="800000"/>
+            <a:headEnd/>
+            <a:tailEnd/>
+          </a:ln>
+        </p:spPr>
+      </p:pic>
+    </p:spTree>
+  </p:cSld>
+  <p:clrMapOvr>
+    <a:masterClrMapping/>
+  </p:clrMapOvr>
+</p:sld>
+</file>
+
 <file path=ppt/slides/slide16.xml><?xml version="1.0" encoding="utf-8"?>
+<p:sld xmlns:a="http://schemas.openxmlformats.org/drawingml/2006/main" xmlns:r="http://schemas.openxmlformats.org/officeDocument/2006/relationships" xmlns:p="http://schemas.openxmlformats.org/presentationml/2006/main">
+  <p:cSld>
+    <p:spTree>
+      <p:nvGrpSpPr>
+        <p:cNvPr id="1" name=""/>
+        <p:cNvGrpSpPr/>
+        <p:nvPr/>
+      </p:nvGrpSpPr>
+      <p:grpSpPr>
+        <a:xfrm>
+          <a:off x="0" y="0"/>
+          <a:ext cx="0" cy="0"/>
+          <a:chOff x="0" y="0"/>
+          <a:chExt cx="0" cy="0"/>
+        </a:xfrm>
+      </p:grpSpPr>
+      <p:pic>
+        <p:nvPicPr>
+          <p:cNvPr id="4" name="Picture 2" descr="https://lh3.ggpht.com/1IfZLL2QDSjZ0wS7sUhaMlsAOS8BBzdR3wZ1WawgRn7KZAM8nEVZYMOUM-lqQb0ikIzp=w300"/>
+          <p:cNvPicPr>
+            <a:picLocks noChangeAspect="1" noChangeArrowheads="1"/>
+          </p:cNvPicPr>
+          <p:nvPr/>
+        </p:nvPicPr>
+        <p:blipFill>
+          <a:blip r:embed="rId2" cstate="print"/>
+          <a:srcRect/>
+          <a:stretch>
+            <a:fillRect/>
+          </a:stretch>
+        </p:blipFill>
+        <p:spPr bwMode="auto">
+          <a:xfrm>
+            <a:off x="3276600" y="1905000"/>
+            <a:ext cx="2857500" cy="2857500"/>
+          </a:xfrm>
+          <a:prstGeom prst="rect">
+            <a:avLst/>
+          </a:prstGeom>
+          <a:noFill/>
+        </p:spPr>
+      </p:pic>
+    </p:spTree>
+  </p:cSld>
+  <p:clrMapOvr>
+    <a:masterClrMapping/>
+  </p:clrMapOvr>
+</p:sld>
+</file>
+
+<file path=ppt/slides/slide17.xml><?xml version="1.0" encoding="utf-8"?>
 <p:sld xmlns:a="http://schemas.openxmlformats.org/drawingml/2006/main" xmlns:r="http://schemas.openxmlformats.org/officeDocument/2006/relationships" xmlns:p="http://schemas.openxmlformats.org/presentationml/2006/main">
   <p:cSld>
     <p:spTree>
@@ -4815,7 +4963,7 @@
 </p:sld>
 </file>
 
-<file path=ppt/slides/slide17.xml><?xml version="1.0" encoding="utf-8"?>
+<file path=ppt/slides/slide18.xml><?xml version="1.0" encoding="utf-8"?>
 <p:sld xmlns:a="http://schemas.openxmlformats.org/drawingml/2006/main" xmlns:r="http://schemas.openxmlformats.org/officeDocument/2006/relationships" xmlns:p="http://schemas.openxmlformats.org/presentationml/2006/main">
   <p:cSld>
     <p:spTree>
@@ -4919,7 +5067,7 @@
 </p:sld>
 </file>
 
-<file path=ppt/slides/slide18.xml><?xml version="1.0" encoding="utf-8"?>
+<file path=ppt/slides/slide19.xml><?xml version="1.0" encoding="utf-8"?>
 <p:sld xmlns:a="http://schemas.openxmlformats.org/drawingml/2006/main" xmlns:r="http://schemas.openxmlformats.org/officeDocument/2006/relationships" xmlns:p="http://schemas.openxmlformats.org/presentationml/2006/main">
   <p:cSld>
     <p:spTree>
@@ -4979,115 +5127,6 @@
           <a:xfrm>
             <a:off x="1285875" y="1920875"/>
             <a:ext cx="6572250" cy="3641725"/>
-          </a:xfrm>
-          <a:prstGeom prst="rect">
-            <a:avLst/>
-          </a:prstGeom>
-          <a:noFill/>
-          <a:ln w="9525">
-            <a:noFill/>
-            <a:miter lim="800000"/>
-            <a:headEnd/>
-            <a:tailEnd/>
-          </a:ln>
-        </p:spPr>
-      </p:pic>
-    </p:spTree>
-  </p:cSld>
-  <p:clrMapOvr>
-    <a:masterClrMapping/>
-  </p:clrMapOvr>
-</p:sld>
-</file>
-
-<file path=ppt/slides/slide19.xml><?xml version="1.0" encoding="utf-8"?>
-<p:sld xmlns:a="http://schemas.openxmlformats.org/drawingml/2006/main" xmlns:r="http://schemas.openxmlformats.org/officeDocument/2006/relationships" xmlns:p="http://schemas.openxmlformats.org/presentationml/2006/main">
-  <p:cSld>
-    <p:spTree>
-      <p:nvGrpSpPr>
-        <p:cNvPr id="1" name=""/>
-        <p:cNvGrpSpPr/>
-        <p:nvPr/>
-      </p:nvGrpSpPr>
-      <p:grpSpPr>
-        <a:xfrm>
-          <a:off x="0" y="0"/>
-          <a:ext cx="0" cy="0"/>
-          <a:chOff x="0" y="0"/>
-          <a:chExt cx="0" cy="0"/>
-        </a:xfrm>
-      </p:grpSpPr>
-      <p:sp>
-        <p:nvSpPr>
-          <p:cNvPr id="2" name="Title 1"/>
-          <p:cNvSpPr>
-            <a:spLocks noGrp="1"/>
-          </p:cNvSpPr>
-          <p:nvPr>
-            <p:ph type="title"/>
-          </p:nvPr>
-        </p:nvSpPr>
-        <p:spPr/>
-        <p:txBody>
-          <a:bodyPr/>
-          <a:lstStyle/>
-          <a:p>
-            <a:pPr algn="l"/>
-            <a:r>
-              <a:rPr lang="en-US" dirty="0" smtClean="0"/>
-              <a:t>4. Review Credit Balance</a:t>
-            </a:r>
-            <a:endParaRPr lang="en-US" dirty="0"/>
-          </a:p>
-        </p:txBody>
-      </p:sp>
-      <p:sp>
-        <p:nvSpPr>
-          <p:cNvPr id="3" name="Content Placeholder 2"/>
-          <p:cNvSpPr>
-            <a:spLocks noGrp="1"/>
-          </p:cNvSpPr>
-          <p:nvPr>
-            <p:ph idx="1"/>
-          </p:nvPr>
-        </p:nvSpPr>
-        <p:spPr/>
-        <p:txBody>
-          <a:bodyPr/>
-          <a:lstStyle/>
-          <a:p>
-            <a:r>
-              <a:rPr lang="en-US" sz="2400" dirty="0" smtClean="0">
-                <a:hlinkClick r:id="rId2"/>
-              </a:rPr>
-              <a:t>https://platform.claude.com/settings/billing</a:t>
-            </a:r>
-            <a:endParaRPr lang="en-US" sz="2400" dirty="0" smtClean="0"/>
-          </a:p>
-          <a:p>
-            <a:endParaRPr lang="en-US" sz="2400" dirty="0"/>
-          </a:p>
-        </p:txBody>
-      </p:sp>
-      <p:pic>
-        <p:nvPicPr>
-          <p:cNvPr id="3075" name="Picture 3"/>
-          <p:cNvPicPr>
-            <a:picLocks noChangeAspect="1" noChangeArrowheads="1"/>
-          </p:cNvPicPr>
-          <p:nvPr/>
-        </p:nvPicPr>
-        <p:blipFill>
-          <a:blip r:embed="rId3" cstate="print"/>
-          <a:srcRect/>
-          <a:stretch>
-            <a:fillRect/>
-          </a:stretch>
-        </p:blipFill>
-        <p:spPr bwMode="auto">
-          <a:xfrm>
-            <a:off x="1373188" y="2847975"/>
-            <a:ext cx="6397625" cy="2790825"/>
           </a:xfrm>
           <a:prstGeom prst="rect">
             <a:avLst/>
@@ -5260,7 +5299,7 @@
             <a:pPr algn="l"/>
             <a:r>
               <a:rPr lang="en-US" dirty="0" smtClean="0"/>
-              <a:t>5. Use Azure Model</a:t>
+              <a:t>4. Review Credit Balance</a:t>
             </a:r>
             <a:endParaRPr lang="en-US" dirty="0"/>
           </a:p>
@@ -5285,7 +5324,7 @@
               <a:rPr lang="en-US" sz="2400" dirty="0" smtClean="0">
                 <a:hlinkClick r:id="rId2"/>
               </a:rPr>
-              <a:t>https://code.claude.com/docs/en/microsoft-foundry</a:t>
+              <a:t>https://platform.claude.com/settings/billing</a:t>
             </a:r>
             <a:endParaRPr lang="en-US" sz="2400" dirty="0" smtClean="0"/>
           </a:p>
@@ -5294,6 +5333,38 @@
           </a:p>
         </p:txBody>
       </p:sp>
+      <p:pic>
+        <p:nvPicPr>
+          <p:cNvPr id="3075" name="Picture 3"/>
+          <p:cNvPicPr>
+            <a:picLocks noChangeAspect="1" noChangeArrowheads="1"/>
+          </p:cNvPicPr>
+          <p:nvPr/>
+        </p:nvPicPr>
+        <p:blipFill>
+          <a:blip r:embed="rId3" cstate="print"/>
+          <a:srcRect/>
+          <a:stretch>
+            <a:fillRect/>
+          </a:stretch>
+        </p:blipFill>
+        <p:spPr bwMode="auto">
+          <a:xfrm>
+            <a:off x="1373188" y="2847975"/>
+            <a:ext cx="6397625" cy="2790825"/>
+          </a:xfrm>
+          <a:prstGeom prst="rect">
+            <a:avLst/>
+          </a:prstGeom>
+          <a:noFill/>
+          <a:ln w="9525">
+            <a:noFill/>
+            <a:miter lim="800000"/>
+            <a:headEnd/>
+            <a:tailEnd/>
+          </a:ln>
+        </p:spPr>
+      </p:pic>
     </p:spTree>
   </p:cSld>
   <p:clrMapOvr>
@@ -5303,6 +5374,83 @@
 </file>
 
 <file path=ppt/slides/slide21.xml><?xml version="1.0" encoding="utf-8"?>
+<p:sld xmlns:a="http://schemas.openxmlformats.org/drawingml/2006/main" xmlns:r="http://schemas.openxmlformats.org/officeDocument/2006/relationships" xmlns:p="http://schemas.openxmlformats.org/presentationml/2006/main">
+  <p:cSld>
+    <p:spTree>
+      <p:nvGrpSpPr>
+        <p:cNvPr id="1" name=""/>
+        <p:cNvGrpSpPr/>
+        <p:nvPr/>
+      </p:nvGrpSpPr>
+      <p:grpSpPr>
+        <a:xfrm>
+          <a:off x="0" y="0"/>
+          <a:ext cx="0" cy="0"/>
+          <a:chOff x="0" y="0"/>
+          <a:chExt cx="0" cy="0"/>
+        </a:xfrm>
+      </p:grpSpPr>
+      <p:sp>
+        <p:nvSpPr>
+          <p:cNvPr id="2" name="Title 1"/>
+          <p:cNvSpPr>
+            <a:spLocks noGrp="1"/>
+          </p:cNvSpPr>
+          <p:nvPr>
+            <p:ph type="title"/>
+          </p:nvPr>
+        </p:nvSpPr>
+        <p:spPr/>
+        <p:txBody>
+          <a:bodyPr/>
+          <a:lstStyle/>
+          <a:p>
+            <a:pPr algn="l"/>
+            <a:r>
+              <a:rPr lang="en-US" dirty="0" smtClean="0"/>
+              <a:t>5. Use Azure Model</a:t>
+            </a:r>
+            <a:endParaRPr lang="en-US" dirty="0"/>
+          </a:p>
+        </p:txBody>
+      </p:sp>
+      <p:sp>
+        <p:nvSpPr>
+          <p:cNvPr id="3" name="Content Placeholder 2"/>
+          <p:cNvSpPr>
+            <a:spLocks noGrp="1"/>
+          </p:cNvSpPr>
+          <p:nvPr>
+            <p:ph idx="1"/>
+          </p:nvPr>
+        </p:nvSpPr>
+        <p:spPr/>
+        <p:txBody>
+          <a:bodyPr/>
+          <a:lstStyle/>
+          <a:p>
+            <a:r>
+              <a:rPr lang="en-US" sz="2400" dirty="0" smtClean="0">
+                <a:hlinkClick r:id="rId2"/>
+              </a:rPr>
+              <a:t>https://code.claude.com/docs/en/microsoft-foundry</a:t>
+            </a:r>
+            <a:endParaRPr lang="en-US" sz="2400" dirty="0" smtClean="0"/>
+          </a:p>
+          <a:p>
+            <a:endParaRPr lang="en-US" sz="2400" dirty="0"/>
+          </a:p>
+        </p:txBody>
+      </p:sp>
+    </p:spTree>
+  </p:cSld>
+  <p:clrMapOvr>
+    <a:masterClrMapping/>
+  </p:clrMapOvr>
+</p:sld>
+</file>
+
+<file path=ppt/slides/slide22.xml><?xml version="1.0" encoding="utf-8"?>
 <p:sld xmlns:a="http://schemas.openxmlformats.org/drawingml/2006/main" xmlns:r="http://schemas.openxmlformats.org/officeDocument/2006/relationships" xmlns:p="http://schemas.openxmlformats.org/presentationml/2006/main">
   <p:cSld>
     <p:spTree>
@@ -5353,7 +5501,7 @@
 </p:sld>
 </file>
 
-<file path=ppt/slides/slide22.xml><?xml version="1.0" encoding="utf-8"?>
+<file path=ppt/slides/slide23.xml><?xml version="1.0" encoding="utf-8"?>
 <p:sld xmlns:a="http://schemas.openxmlformats.org/drawingml/2006/main" xmlns:r="http://schemas.openxmlformats.org/officeDocument/2006/relationships" xmlns:p="http://schemas.openxmlformats.org/presentationml/2006/main">
   <p:cSld>
     <p:spTree>
@@ -5463,92 +5611,6 @@
 </p:sld>
 </file>
 
-<file path=ppt/slides/slide23.xml><?xml version="1.0" encoding="utf-8"?>
-<p:sld xmlns:a="http://schemas.openxmlformats.org/drawingml/2006/main" xmlns:r="http://schemas.openxmlformats.org/officeDocument/2006/relationships" xmlns:p="http://schemas.openxmlformats.org/presentationml/2006/main">
-  <p:cSld>
-    <p:spTree>
-      <p:nvGrpSpPr>
-        <p:cNvPr id="1" name=""/>
-        <p:cNvGrpSpPr/>
-        <p:nvPr/>
-      </p:nvGrpSpPr>
-      <p:grpSpPr>
-        <a:xfrm>
-          <a:off x="0" y="0"/>
-          <a:ext cx="0" cy="0"/>
-          <a:chOff x="0" y="0"/>
-          <a:chExt cx="0" cy="0"/>
-        </a:xfrm>
-      </p:grpSpPr>
-      <p:sp>
-        <p:nvSpPr>
-          <p:cNvPr id="2" name="Title 1"/>
-          <p:cNvSpPr>
-            <a:spLocks noGrp="1"/>
-          </p:cNvSpPr>
-          <p:nvPr>
-            <p:ph type="title"/>
-          </p:nvPr>
-        </p:nvSpPr>
-        <p:spPr/>
-        <p:txBody>
-          <a:bodyPr/>
-          <a:lstStyle/>
-          <a:p>
-            <a:pPr algn="l"/>
-            <a:r>
-              <a:rPr lang="en-US" dirty="0" smtClean="0"/>
-              <a:t>2. Commit the CLAUDE.md file</a:t>
-            </a:r>
-            <a:endParaRPr lang="en-US" dirty="0"/>
-          </a:p>
-        </p:txBody>
-      </p:sp>
-      <p:sp>
-        <p:nvSpPr>
-          <p:cNvPr id="3" name="Content Placeholder 2"/>
-          <p:cNvSpPr>
-            <a:spLocks noGrp="1"/>
-          </p:cNvSpPr>
-          <p:nvPr>
-            <p:ph idx="1"/>
-          </p:nvPr>
-        </p:nvSpPr>
-        <p:spPr/>
-        <p:txBody>
-          <a:bodyPr/>
-          <a:lstStyle/>
-          <a:p>
-            <a:r>
-              <a:rPr lang="en-US" sz="2400" b="1" dirty="0" smtClean="0"/>
-              <a:t>&gt; Use </a:t>
-            </a:r>
-            <a:r>
-              <a:rPr lang="en-US" sz="2400" b="1" dirty="0" err="1" smtClean="0"/>
-              <a:t>github</a:t>
-            </a:r>
-            <a:r>
-              <a:rPr lang="en-US" sz="2400" b="1" dirty="0" smtClean="0"/>
-              <a:t> CLI to commit the CLAUDE.md file</a:t>
-            </a:r>
-          </a:p>
-          <a:p>
-            <a:r>
-              <a:rPr lang="en-US" sz="2400" b="1" dirty="0" smtClean="0"/>
-              <a:t>&gt; Commit and push this change</a:t>
-            </a:r>
-            <a:endParaRPr lang="en-US" sz="2400" dirty="0"/>
-          </a:p>
-        </p:txBody>
-      </p:sp>
-    </p:spTree>
-  </p:cSld>
-  <p:clrMapOvr>
-    <a:masterClrMapping/>
-  </p:clrMapOvr>
-</p:sld>
-</file>
-
 <file path=ppt/slides/slide24.xml><?xml version="1.0" encoding="utf-8"?>
 <p:sld xmlns:a="http://schemas.openxmlformats.org/drawingml/2006/main" xmlns:r="http://schemas.openxmlformats.org/officeDocument/2006/relationships" xmlns:p="http://schemas.openxmlformats.org/presentationml/2006/main">
   <p:cSld>
@@ -5584,7 +5646,7 @@
             <a:pPr algn="l"/>
             <a:r>
               <a:rPr lang="en-US" dirty="0" smtClean="0"/>
-              <a:t>3. Enable Web Search Tool</a:t>
+              <a:t>2. Commit the CLAUDE.md file</a:t>
             </a:r>
             <a:endParaRPr lang="en-US" dirty="0"/>
           </a:p>
@@ -5606,14 +5668,23 @@
           <a:lstStyle/>
           <a:p>
             <a:r>
-              <a:rPr lang="en-US" sz="2400" dirty="0" smtClean="0">
-                <a:hlinkClick r:id="rId2"/>
-              </a:rPr>
-              <a:t>https://platform.claude.com/docs/en/agents-and-tools/tool-use/web-search-tool</a:t>
-            </a:r>
-            <a:endParaRPr lang="en-US" sz="2400" dirty="0" smtClean="0"/>
-          </a:p>
-          <a:p>
+              <a:rPr lang="en-US" sz="2400" b="1" dirty="0" smtClean="0"/>
+              <a:t>&gt; Use </a:t>
+            </a:r>
+            <a:r>
+              <a:rPr lang="en-US" sz="2400" b="1" dirty="0" err="1" smtClean="0"/>
+              <a:t>github</a:t>
+            </a:r>
+            <a:r>
+              <a:rPr lang="en-US" sz="2400" b="1" dirty="0" smtClean="0"/>
+              <a:t> CLI to commit the CLAUDE.md file</a:t>
+            </a:r>
+          </a:p>
+          <a:p>
+            <a:r>
+              <a:rPr lang="en-US" sz="2400" b="1" dirty="0" smtClean="0"/>
+              <a:t>&gt; Commit and push this change</a:t>
+            </a:r>
             <a:endParaRPr lang="en-US" sz="2400" dirty="0"/>
           </a:p>
         </p:txBody>
@@ -5627,6 +5698,83 @@
 </file>
 
 <file path=ppt/slides/slide25.xml><?xml version="1.0" encoding="utf-8"?>
+<p:sld xmlns:a="http://schemas.openxmlformats.org/drawingml/2006/main" xmlns:r="http://schemas.openxmlformats.org/officeDocument/2006/relationships" xmlns:p="http://schemas.openxmlformats.org/presentationml/2006/main">
+  <p:cSld>
+    <p:spTree>
+      <p:nvGrpSpPr>
+        <p:cNvPr id="1" name=""/>
+        <p:cNvGrpSpPr/>
+        <p:nvPr/>
+      </p:nvGrpSpPr>
+      <p:grpSpPr>
+        <a:xfrm>
+          <a:off x="0" y="0"/>
+          <a:ext cx="0" cy="0"/>
+          <a:chOff x="0" y="0"/>
+          <a:chExt cx="0" cy="0"/>
+        </a:xfrm>
+      </p:grpSpPr>
+      <p:sp>
+        <p:nvSpPr>
+          <p:cNvPr id="2" name="Title 1"/>
+          <p:cNvSpPr>
+            <a:spLocks noGrp="1"/>
+          </p:cNvSpPr>
+          <p:nvPr>
+            <p:ph type="title"/>
+          </p:nvPr>
+        </p:nvSpPr>
+        <p:spPr/>
+        <p:txBody>
+          <a:bodyPr/>
+          <a:lstStyle/>
+          <a:p>
+            <a:pPr algn="l"/>
+            <a:r>
+              <a:rPr lang="en-US" dirty="0" smtClean="0"/>
+              <a:t>3. Enable Web Search Tool</a:t>
+            </a:r>
+            <a:endParaRPr lang="en-US" dirty="0"/>
+          </a:p>
+        </p:txBody>
+      </p:sp>
+      <p:sp>
+        <p:nvSpPr>
+          <p:cNvPr id="3" name="Content Placeholder 2"/>
+          <p:cNvSpPr>
+            <a:spLocks noGrp="1"/>
+          </p:cNvSpPr>
+          <p:nvPr>
+            <p:ph idx="1"/>
+          </p:nvPr>
+        </p:nvSpPr>
+        <p:spPr/>
+        <p:txBody>
+          <a:bodyPr/>
+          <a:lstStyle/>
+          <a:p>
+            <a:r>
+              <a:rPr lang="en-US" sz="2400" dirty="0" smtClean="0">
+                <a:hlinkClick r:id="rId2"/>
+              </a:rPr>
+              <a:t>https://platform.claude.com/docs/en/agents-and-tools/tool-use/web-search-tool</a:t>
+            </a:r>
+            <a:endParaRPr lang="en-US" sz="2400" dirty="0" smtClean="0"/>
+          </a:p>
+          <a:p>
+            <a:endParaRPr lang="en-US" sz="2400" dirty="0"/>
+          </a:p>
+        </p:txBody>
+      </p:sp>
+    </p:spTree>
+  </p:cSld>
+  <p:clrMapOvr>
+    <a:masterClrMapping/>
+  </p:clrMapOvr>
+</p:sld>
+</file>
+
+<file path=ppt/slides/slide26.xml><?xml version="1.0" encoding="utf-8"?>
 <p:sld xmlns:a="http://schemas.openxmlformats.org/drawingml/2006/main" xmlns:r="http://schemas.openxmlformats.org/officeDocument/2006/relationships" xmlns:p="http://schemas.openxmlformats.org/presentationml/2006/main">
   <p:cSld>
     <p:spTree>
@@ -5677,7 +5825,7 @@
 </p:sld>
 </file>
 
-<file path=ppt/slides/slide26.xml><?xml version="1.0" encoding="utf-8"?>
+<file path=ppt/slides/slide27.xml><?xml version="1.0" encoding="utf-8"?>
 <p:sld xmlns:a="http://schemas.openxmlformats.org/drawingml/2006/main" xmlns:r="http://schemas.openxmlformats.org/officeDocument/2006/relationships" xmlns:p="http://schemas.openxmlformats.org/presentationml/2006/main">
   <p:cSld>
     <p:spTree>
@@ -5758,7 +5906,7 @@
 </p:sld>
 </file>
 
-<file path=ppt/slides/slide27.xml><?xml version="1.0" encoding="utf-8"?>
+<file path=ppt/slides/slide28.xml><?xml version="1.0" encoding="utf-8"?>
 <p:sld xmlns:a="http://schemas.openxmlformats.org/drawingml/2006/main" xmlns:r="http://schemas.openxmlformats.org/officeDocument/2006/relationships" xmlns:p="http://schemas.openxmlformats.org/presentationml/2006/main">
   <p:cSld>
     <p:spTree>
@@ -5867,203 +6015,6 @@
 </p:sld>
 </file>
 
-<file path=ppt/slides/slide28.xml><?xml version="1.0" encoding="utf-8"?>
-<p:sld xmlns:a="http://schemas.openxmlformats.org/drawingml/2006/main" xmlns:r="http://schemas.openxmlformats.org/officeDocument/2006/relationships" xmlns:p="http://schemas.openxmlformats.org/presentationml/2006/main">
-  <p:cSld>
-    <p:spTree>
-      <p:nvGrpSpPr>
-        <p:cNvPr id="1" name=""/>
-        <p:cNvGrpSpPr/>
-        <p:nvPr/>
-      </p:nvGrpSpPr>
-      <p:grpSpPr>
-        <a:xfrm>
-          <a:off x="0" y="0"/>
-          <a:ext cx="0" cy="0"/>
-          <a:chOff x="0" y="0"/>
-          <a:chExt cx="0" cy="0"/>
-        </a:xfrm>
-      </p:grpSpPr>
-      <p:sp>
-        <p:nvSpPr>
-          <p:cNvPr id="2" name="Title 1"/>
-          <p:cNvSpPr>
-            <a:spLocks noGrp="1"/>
-          </p:cNvSpPr>
-          <p:nvPr>
-            <p:ph type="title"/>
-          </p:nvPr>
-        </p:nvSpPr>
-        <p:spPr/>
-        <p:txBody>
-          <a:bodyPr/>
-          <a:lstStyle/>
-          <a:p>
-            <a:pPr algn="l"/>
-            <a:r>
-              <a:rPr lang="en-US" dirty="0" smtClean="0"/>
-              <a:t>3. Set Up </a:t>
-            </a:r>
-            <a:r>
-              <a:rPr lang="en-US" dirty="0" err="1" smtClean="0"/>
-              <a:t>Git</a:t>
-            </a:r>
-            <a:endParaRPr lang="en-US" dirty="0"/>
-          </a:p>
-        </p:txBody>
-      </p:sp>
-      <p:sp>
-        <p:nvSpPr>
-          <p:cNvPr id="3" name="Content Placeholder 2"/>
-          <p:cNvSpPr>
-            <a:spLocks noGrp="1"/>
-          </p:cNvSpPr>
-          <p:nvPr>
-            <p:ph idx="1"/>
-          </p:nvPr>
-        </p:nvSpPr>
-        <p:spPr/>
-        <p:txBody>
-          <a:bodyPr/>
-          <a:lstStyle/>
-          <a:p>
-            <a:r>
-              <a:rPr lang="en-US" sz="2400" dirty="0" smtClean="0"/>
-              <a:t>Add these directories </a:t>
-            </a:r>
-            <a:r>
-              <a:rPr lang="en-US" sz="2400" b="1" dirty="0" smtClean="0"/>
-              <a:t>at the top</a:t>
-            </a:r>
-            <a:r>
-              <a:rPr lang="en-US" sz="2400" dirty="0" smtClean="0"/>
-              <a:t> in the system PATH.</a:t>
-            </a:r>
-          </a:p>
-          <a:p>
-            <a:pPr>
-              <a:buNone/>
-            </a:pPr>
-            <a:r>
-              <a:rPr lang="de-DE" sz="2400" dirty="0" smtClean="0"/>
-              <a:t>	C:\Program Files\Git\usr\bin</a:t>
-            </a:r>
-            <a:br>
-              <a:rPr lang="de-DE" sz="2400" dirty="0" smtClean="0"/>
-            </a:br>
-            <a:r>
-              <a:rPr lang="de-DE" sz="2400" dirty="0" smtClean="0"/>
-              <a:t>C:\Program Files\Git\bin</a:t>
-            </a:r>
-          </a:p>
-          <a:p>
-            <a:r>
-              <a:rPr lang="en-US" sz="2400" b="1" dirty="0" smtClean="0"/>
-              <a:t>where bash</a:t>
-            </a:r>
-          </a:p>
-          <a:p>
-            <a:pPr>
-              <a:buNone/>
-            </a:pPr>
-            <a:r>
-              <a:rPr lang="en-US" sz="2400" dirty="0" smtClean="0"/>
-              <a:t>	</a:t>
-            </a:r>
-            <a:r>
-              <a:rPr lang="en-US" sz="2400" i="1" dirty="0" smtClean="0"/>
-              <a:t>Expected: C:\Program Files\</a:t>
-            </a:r>
-            <a:r>
-              <a:rPr lang="en-US" sz="2400" i="1" dirty="0" err="1" smtClean="0"/>
-              <a:t>Git</a:t>
-            </a:r>
-            <a:r>
-              <a:rPr lang="en-US" sz="2400" i="1" dirty="0" smtClean="0"/>
-              <a:t>\</a:t>
-            </a:r>
-            <a:r>
-              <a:rPr lang="en-US" sz="2400" i="1" dirty="0" err="1" smtClean="0"/>
-              <a:t>usr</a:t>
-            </a:r>
-            <a:r>
-              <a:rPr lang="en-US" sz="2400" i="1" dirty="0" smtClean="0"/>
-              <a:t>\bin\bash.exe</a:t>
-            </a:r>
-          </a:p>
-          <a:p>
-            <a:r>
-              <a:rPr lang="en-US" sz="2400" b="1" dirty="0" smtClean="0"/>
-              <a:t>bash --version</a:t>
-            </a:r>
-          </a:p>
-          <a:p>
-            <a:pPr>
-              <a:buNone/>
-            </a:pPr>
-            <a:r>
-              <a:rPr lang="en-US" sz="2400" dirty="0" smtClean="0"/>
-              <a:t>	</a:t>
-            </a:r>
-            <a:r>
-              <a:rPr lang="en-US" sz="2400" i="1" dirty="0" smtClean="0"/>
-              <a:t>Expected output: GNU bash, version X.X.X</a:t>
-            </a:r>
-          </a:p>
-          <a:p>
-            <a:r>
-              <a:rPr lang="en-US" sz="2400" b="1" dirty="0" err="1" smtClean="0"/>
-              <a:t>setx</a:t>
-            </a:r>
-            <a:r>
-              <a:rPr lang="en-US" sz="2400" b="1" dirty="0" smtClean="0"/>
-              <a:t> CLAUDE_CODE_GIT_BASH_PATH "C:\Program Files\</a:t>
-            </a:r>
-            <a:r>
-              <a:rPr lang="en-US" sz="2400" b="1" dirty="0" err="1" smtClean="0"/>
-              <a:t>Git</a:t>
-            </a:r>
-            <a:r>
-              <a:rPr lang="en-US" sz="2400" b="1" dirty="0" smtClean="0"/>
-              <a:t>\</a:t>
-            </a:r>
-            <a:r>
-              <a:rPr lang="en-US" sz="2400" b="1" dirty="0" err="1" smtClean="0"/>
-              <a:t>usr</a:t>
-            </a:r>
-            <a:r>
-              <a:rPr lang="en-US" sz="2400" b="1" dirty="0" smtClean="0"/>
-              <a:t>\bin\bash.exe"</a:t>
-            </a:r>
-          </a:p>
-          <a:p>
-            <a:r>
-              <a:rPr lang="en-US" sz="2400" dirty="0" smtClean="0"/>
-              <a:t>Restart your computer.</a:t>
-            </a:r>
-          </a:p>
-          <a:p>
-            <a:r>
-              <a:rPr lang="en-US" sz="2400" b="1" dirty="0" smtClean="0"/>
-              <a:t>echo %CLAUDE_CODE_GIT_BASH_PATH%</a:t>
-            </a:r>
-          </a:p>
-          <a:p>
-            <a:pPr>
-              <a:buNone/>
-            </a:pPr>
-            <a:endParaRPr lang="en-US" sz="2400" b="1" dirty="0" smtClean="0"/>
-          </a:p>
-        </p:txBody>
-      </p:sp>
-    </p:spTree>
-  </p:cSld>
-  <p:clrMapOvr>
-    <a:masterClrMapping/>
-  </p:clrMapOvr>
-</p:sld>
-</file>
-
 <file path=ppt/slides/slide29.xml><?xml version="1.0" encoding="utf-8"?>
 <p:sld xmlns:a="http://schemas.openxmlformats.org/drawingml/2006/main" xmlns:r="http://schemas.openxmlformats.org/officeDocument/2006/relationships" xmlns:p="http://schemas.openxmlformats.org/presentationml/2006/main">
   <p:cSld>
@@ -6099,44 +6050,160 @@
             <a:pPr algn="l"/>
             <a:r>
               <a:rPr lang="en-US" dirty="0" smtClean="0"/>
-              <a:t>4. Set Up Claude Code</a:t>
+              <a:t>3. Set Up </a:t>
+            </a:r>
+            <a:r>
+              <a:rPr lang="en-US" dirty="0" err="1" smtClean="0"/>
+              <a:t>Git</a:t>
             </a:r>
             <a:endParaRPr lang="en-US" dirty="0"/>
           </a:p>
         </p:txBody>
       </p:sp>
-      <p:pic>
-        <p:nvPicPr>
-          <p:cNvPr id="2050" name="Picture 2"/>
-          <p:cNvPicPr>
-            <a:picLocks noChangeAspect="1" noChangeArrowheads="1"/>
-          </p:cNvPicPr>
-          <p:nvPr/>
-        </p:nvPicPr>
-        <p:blipFill>
-          <a:blip r:embed="rId2" cstate="print"/>
-          <a:srcRect/>
-          <a:stretch>
-            <a:fillRect/>
-          </a:stretch>
-        </p:blipFill>
-        <p:spPr bwMode="auto">
-          <a:xfrm>
-            <a:off x="1143000" y="2133600"/>
-            <a:ext cx="6863318" cy="3551368"/>
-          </a:xfrm>
-          <a:prstGeom prst="rect">
-            <a:avLst/>
-          </a:prstGeom>
-          <a:noFill/>
-          <a:ln w="9525">
-            <a:noFill/>
-            <a:miter lim="800000"/>
-            <a:headEnd/>
-            <a:tailEnd/>
-          </a:ln>
-        </p:spPr>
-      </p:pic>
+      <p:sp>
+        <p:nvSpPr>
+          <p:cNvPr id="3" name="Content Placeholder 2"/>
+          <p:cNvSpPr>
+            <a:spLocks noGrp="1"/>
+          </p:cNvSpPr>
+          <p:nvPr>
+            <p:ph idx="1"/>
+          </p:nvPr>
+        </p:nvSpPr>
+        <p:spPr/>
+        <p:txBody>
+          <a:bodyPr/>
+          <a:lstStyle/>
+          <a:p>
+            <a:r>
+              <a:rPr lang="en-US" sz="2400" dirty="0" smtClean="0"/>
+              <a:t>Add these directories </a:t>
+            </a:r>
+            <a:r>
+              <a:rPr lang="en-US" sz="2400" b="1" dirty="0" smtClean="0"/>
+              <a:t>at the top</a:t>
+            </a:r>
+            <a:r>
+              <a:rPr lang="en-US" sz="2400" dirty="0" smtClean="0"/>
+              <a:t> in the system PATH.</a:t>
+            </a:r>
+          </a:p>
+          <a:p>
+            <a:pPr>
+              <a:buNone/>
+            </a:pPr>
+            <a:r>
+              <a:rPr lang="de-DE" sz="2400" dirty="0" smtClean="0"/>
+              <a:t>	C:\Program Files\Git\usr\bin</a:t>
+            </a:r>
+            <a:br>
+              <a:rPr lang="de-DE" sz="2400" dirty="0" smtClean="0"/>
+            </a:br>
+            <a:r>
+              <a:rPr lang="de-DE" sz="2400" dirty="0" smtClean="0"/>
+              <a:t>C:\Program Files\Git\bin</a:t>
+            </a:r>
+          </a:p>
+          <a:p>
+            <a:r>
+              <a:rPr lang="en-US" sz="2400" b="1" dirty="0" smtClean="0"/>
+              <a:t>where bash</a:t>
+            </a:r>
+          </a:p>
+          <a:p>
+            <a:pPr>
+              <a:buNone/>
+            </a:pPr>
+            <a:r>
+              <a:rPr lang="en-US" sz="2400" dirty="0" smtClean="0"/>
+              <a:t>	</a:t>
+            </a:r>
+            <a:r>
+              <a:rPr lang="en-US" sz="2400" i="1" dirty="0" smtClean="0"/>
+              <a:t>Expected: C:\Program Files\</a:t>
+            </a:r>
+            <a:r>
+              <a:rPr lang="en-US" sz="2400" i="1" dirty="0" err="1" smtClean="0"/>
+              <a:t>Git</a:t>
+            </a:r>
+            <a:r>
+              <a:rPr lang="en-US" sz="2400" i="1" dirty="0" smtClean="0"/>
+              <a:t>\</a:t>
+            </a:r>
+            <a:r>
+              <a:rPr lang="en-US" sz="2400" i="1" dirty="0" err="1" smtClean="0"/>
+              <a:t>usr</a:t>
+            </a:r>
+            <a:r>
+              <a:rPr lang="en-US" sz="2400" i="1" dirty="0" smtClean="0"/>
+              <a:t>\bin\bash.exe</a:t>
+            </a:r>
+          </a:p>
+          <a:p>
+            <a:r>
+              <a:rPr lang="en-US" sz="2400" b="1" dirty="0" smtClean="0"/>
+              <a:t>bash --version</a:t>
+            </a:r>
+          </a:p>
+          <a:p>
+            <a:pPr>
+              <a:buNone/>
+            </a:pPr>
+            <a:r>
+              <a:rPr lang="en-US" sz="2400" dirty="0" smtClean="0"/>
+              <a:t>	</a:t>
+            </a:r>
+            <a:r>
+              <a:rPr lang="en-US" sz="2400" i="1" dirty="0" smtClean="0"/>
+              <a:t>Expected output: GNU bash, version X.X.X</a:t>
+            </a:r>
+          </a:p>
+          <a:p>
+            <a:r>
+              <a:rPr lang="en-US" sz="2400" b="1" dirty="0" err="1" smtClean="0"/>
+              <a:t>setx</a:t>
+            </a:r>
+            <a:r>
+              <a:rPr lang="en-US" sz="2400" b="1" dirty="0" smtClean="0"/>
+              <a:t> CLAUDE_CODE_GIT_BASH_PATH "C:\Program Files\</a:t>
+            </a:r>
+            <a:r>
+              <a:rPr lang="en-US" sz="2400" b="1" dirty="0" err="1" smtClean="0"/>
+              <a:t>Git</a:t>
+            </a:r>
+            <a:r>
+              <a:rPr lang="en-US" sz="2400" b="1" dirty="0" smtClean="0"/>
+              <a:t>\</a:t>
+            </a:r>
+            <a:r>
+              <a:rPr lang="en-US" sz="2400" b="1" dirty="0" err="1" smtClean="0"/>
+              <a:t>usr</a:t>
+            </a:r>
+            <a:r>
+              <a:rPr lang="en-US" sz="2400" b="1" dirty="0" smtClean="0"/>
+              <a:t>\bin\bash.exe"</a:t>
+            </a:r>
+          </a:p>
+          <a:p>
+            <a:r>
+              <a:rPr lang="en-US" sz="2400" dirty="0" smtClean="0"/>
+              <a:t>Restart your computer.</a:t>
+            </a:r>
+          </a:p>
+          <a:p>
+            <a:r>
+              <a:rPr lang="en-US" sz="2400" b="1" dirty="0" smtClean="0"/>
+              <a:t>echo %CLAUDE_CODE_GIT_BASH_PATH%</a:t>
+            </a:r>
+          </a:p>
+          <a:p>
+            <a:pPr>
+              <a:buNone/>
+            </a:pPr>
+            <a:endParaRPr lang="en-US" sz="2400" b="1" dirty="0" smtClean="0"/>
+          </a:p>
+        </p:txBody>
+      </p:sp>
     </p:spTree>
   </p:cSld>
   <p:clrMapOvr>
@@ -6273,6 +6340,87 @@
           <a:chExt cx="0" cy="0"/>
         </a:xfrm>
       </p:grpSpPr>
+      <p:sp>
+        <p:nvSpPr>
+          <p:cNvPr id="2" name="Title 1"/>
+          <p:cNvSpPr>
+            <a:spLocks noGrp="1"/>
+          </p:cNvSpPr>
+          <p:nvPr>
+            <p:ph type="title"/>
+          </p:nvPr>
+        </p:nvSpPr>
+        <p:spPr/>
+        <p:txBody>
+          <a:bodyPr/>
+          <a:lstStyle/>
+          <a:p>
+            <a:pPr algn="l"/>
+            <a:r>
+              <a:rPr lang="en-US" dirty="0" smtClean="0"/>
+              <a:t>4. Set Up Claude Code</a:t>
+            </a:r>
+            <a:endParaRPr lang="en-US" dirty="0"/>
+          </a:p>
+        </p:txBody>
+      </p:sp>
+      <p:pic>
+        <p:nvPicPr>
+          <p:cNvPr id="2050" name="Picture 2"/>
+          <p:cNvPicPr>
+            <a:picLocks noChangeAspect="1" noChangeArrowheads="1"/>
+          </p:cNvPicPr>
+          <p:nvPr/>
+        </p:nvPicPr>
+        <p:blipFill>
+          <a:blip r:embed="rId2" cstate="print"/>
+          <a:srcRect/>
+          <a:stretch>
+            <a:fillRect/>
+          </a:stretch>
+        </p:blipFill>
+        <p:spPr bwMode="auto">
+          <a:xfrm>
+            <a:off x="1143000" y="2133600"/>
+            <a:ext cx="6863318" cy="3551368"/>
+          </a:xfrm>
+          <a:prstGeom prst="rect">
+            <a:avLst/>
+          </a:prstGeom>
+          <a:noFill/>
+          <a:ln w="9525">
+            <a:noFill/>
+            <a:miter lim="800000"/>
+            <a:headEnd/>
+            <a:tailEnd/>
+          </a:ln>
+        </p:spPr>
+      </p:pic>
+    </p:spTree>
+  </p:cSld>
+  <p:clrMapOvr>
+    <a:masterClrMapping/>
+  </p:clrMapOvr>
+</p:sld>
+</file>
+
+<file path=ppt/slides/slide31.xml><?xml version="1.0" encoding="utf-8"?>
+<p:sld xmlns:a="http://schemas.openxmlformats.org/drawingml/2006/main" xmlns:r="http://schemas.openxmlformats.org/officeDocument/2006/relationships" xmlns:p="http://schemas.openxmlformats.org/presentationml/2006/main">
+  <p:cSld>
+    <p:spTree>
+      <p:nvGrpSpPr>
+        <p:cNvPr id="1" name=""/>
+        <p:cNvGrpSpPr/>
+        <p:nvPr/>
+      </p:nvGrpSpPr>
+      <p:grpSpPr>
+        <a:xfrm>
+          <a:off x="0" y="0"/>
+          <a:ext cx="0" cy="0"/>
+          <a:chOff x="0" y="0"/>
+          <a:chExt cx="0" cy="0"/>
+        </a:xfrm>
+      </p:grpSpPr>
       <p:pic>
         <p:nvPicPr>
           <p:cNvPr id="4" name="Picture 2" descr="https://lh3.ggpht.com/1IfZLL2QDSjZ0wS7sUhaMlsAOS8BBzdR3wZ1WawgRn7KZAM8nEVZYMOUM-lqQb0ikIzp=w300"/>
@@ -6307,106 +6455,6 @@
 </p:sld>
 </file>
 
-<file path=ppt/slides/slide31.xml><?xml version="1.0" encoding="utf-8"?>
-<p:sld xmlns:a="http://schemas.openxmlformats.org/drawingml/2006/main" xmlns:r="http://schemas.openxmlformats.org/officeDocument/2006/relationships" xmlns:p="http://schemas.openxmlformats.org/presentationml/2006/main">
-  <p:cSld>
-    <p:spTree>
-      <p:nvGrpSpPr>
-        <p:cNvPr id="1" name=""/>
-        <p:cNvGrpSpPr/>
-        <p:nvPr/>
-      </p:nvGrpSpPr>
-      <p:grpSpPr>
-        <a:xfrm>
-          <a:off x="0" y="0"/>
-          <a:ext cx="0" cy="0"/>
-          <a:chOff x="0" y="0"/>
-          <a:chExt cx="0" cy="0"/>
-        </a:xfrm>
-      </p:grpSpPr>
-      <p:sp>
-        <p:nvSpPr>
-          <p:cNvPr id="2" name="Title 1"/>
-          <p:cNvSpPr>
-            <a:spLocks noGrp="1"/>
-          </p:cNvSpPr>
-          <p:nvPr>
-            <p:ph type="title"/>
-          </p:nvPr>
-        </p:nvSpPr>
-        <p:spPr/>
-        <p:txBody>
-          <a:bodyPr/>
-          <a:lstStyle/>
-          <a:p>
-            <a:pPr algn="l"/>
-            <a:r>
-              <a:rPr lang="en-US" dirty="0" smtClean="0"/>
-              <a:t>1. Enter Plan Mode</a:t>
-            </a:r>
-            <a:endParaRPr lang="en-US" dirty="0"/>
-          </a:p>
-        </p:txBody>
-      </p:sp>
-      <p:sp>
-        <p:nvSpPr>
-          <p:cNvPr id="3" name="Content Placeholder 2"/>
-          <p:cNvSpPr>
-            <a:spLocks noGrp="1"/>
-          </p:cNvSpPr>
-          <p:nvPr>
-            <p:ph idx="1"/>
-          </p:nvPr>
-        </p:nvSpPr>
-        <p:spPr/>
-        <p:txBody>
-          <a:bodyPr/>
-          <a:lstStyle/>
-          <a:p>
-            <a:r>
-              <a:rPr lang="en-US" sz="2400" dirty="0" smtClean="0"/>
-              <a:t>In Plan Mode, Claude Code explores your codebase and creates a detailed plan before editing any code.</a:t>
-            </a:r>
-          </a:p>
-          <a:p>
-            <a:r>
-              <a:rPr lang="en-US" sz="2400" dirty="0" smtClean="0"/>
-              <a:t>Enter Plan Mode by pressing `</a:t>
-            </a:r>
-            <a:r>
-              <a:rPr lang="en-US" sz="2400" dirty="0" err="1" smtClean="0"/>
-              <a:t>shift+tab+tab</a:t>
-            </a:r>
-            <a:r>
-              <a:rPr lang="en-US" sz="2400" dirty="0" smtClean="0"/>
-              <a:t>`.</a:t>
-            </a:r>
-          </a:p>
-          <a:p>
-            <a:r>
-              <a:rPr lang="en-US" sz="2400" b="1" dirty="0" smtClean="0"/>
-              <a:t>&gt; Think through how to add </a:t>
-            </a:r>
-            <a:r>
-              <a:rPr lang="en-US" sz="2400" b="1" dirty="0" err="1" smtClean="0"/>
-              <a:t>OAuth</a:t>
-            </a:r>
-            <a:r>
-              <a:rPr lang="en-US" sz="2400" b="1" dirty="0" smtClean="0"/>
-              <a:t> authentication to our app. Show the architecture, files we'll need, and implementation steps. Feel free to ask me questions.</a:t>
-            </a:r>
-            <a:endParaRPr lang="en-US" sz="2400" b="1" dirty="0"/>
-          </a:p>
-        </p:txBody>
-      </p:sp>
-    </p:spTree>
-  </p:cSld>
-  <p:clrMapOvr>
-    <a:masterClrMapping/>
-  </p:clrMapOvr>
-</p:sld>
-</file>
-
 <file path=ppt/slides/slide32.xml><?xml version="1.0" encoding="utf-8"?>
 <p:sld xmlns:a="http://schemas.openxmlformats.org/drawingml/2006/main" xmlns:r="http://schemas.openxmlformats.org/officeDocument/2006/relationships" xmlns:p="http://schemas.openxmlformats.org/presentationml/2006/main">
   <p:cSld>
@@ -6441,10 +6489,10 @@
           <a:p>
             <a:pPr algn="l"/>
             <a:r>
-              <a:rPr lang="en-US" sz="4200" dirty="0" smtClean="0"/>
-              <a:t>2. Write Tests First, then Implement</a:t>
-            </a:r>
-            <a:endParaRPr lang="en-US" sz="4200" dirty="0"/>
+              <a:rPr lang="en-US" dirty="0" smtClean="0"/>
+              <a:t>1. Enter Plan Mode</a:t>
+            </a:r>
+            <a:endParaRPr lang="en-US" dirty="0"/>
           </a:p>
         </p:txBody>
       </p:sp>
@@ -6465,13 +6513,27 @@
           <a:p>
             <a:r>
               <a:rPr lang="en-US" sz="2400" dirty="0" smtClean="0"/>
-              <a:t>Claude Code can write comprehensive tests to catch edge cases early and give you confidence that the code works correctly.</a:t>
+              <a:t>In Plan Mode, Claude Code explores your codebase and creates a detailed plan before editing any code.</a:t>
+            </a:r>
+          </a:p>
+          <a:p>
+            <a:r>
+              <a:rPr lang="en-US" sz="2400" dirty="0" smtClean="0"/>
+              <a:t>Enter Plan Mode by pressing `</a:t>
+            </a:r>
+            <a:r>
+              <a:rPr lang="en-US" sz="2400" dirty="0" err="1" smtClean="0"/>
+              <a:t>shift+tab+tab</a:t>
+            </a:r>
+            <a:r>
+              <a:rPr lang="en-US" sz="2400" dirty="0" smtClean="0"/>
+              <a:t>`.</a:t>
             </a:r>
           </a:p>
           <a:p>
             <a:r>
               <a:rPr lang="en-US" sz="2400" b="1" dirty="0" smtClean="0"/>
-              <a:t>&gt; Write comprehensive tests for the </a:t>
+              <a:t>&gt; Think through how to add </a:t>
             </a:r>
             <a:r>
               <a:rPr lang="en-US" sz="2400" b="1" dirty="0" err="1" smtClean="0"/>
@@ -6479,17 +6541,9 @@
             </a:r>
             <a:r>
               <a:rPr lang="en-US" sz="2400" b="1" dirty="0" smtClean="0"/>
-              <a:t> flow - signup, login, token refresh, and error cases. Make sure they fail for now. Then, implement the </a:t>
-            </a:r>
-            <a:r>
-              <a:rPr lang="en-US" sz="2400" b="1" dirty="0" err="1" smtClean="0"/>
-              <a:t>OAuth</a:t>
-            </a:r>
-            <a:r>
-              <a:rPr lang="en-US" sz="2400" b="1" dirty="0" smtClean="0"/>
-              <a:t> system to make these tests pass.</a:t>
-            </a:r>
-            <a:endParaRPr lang="en-US" sz="2400" dirty="0"/>
+              <a:t> authentication to our app. Show the architecture, files we'll need, and implementation steps. Feel free to ask me questions.</a:t>
+            </a:r>
+            <a:endParaRPr lang="en-US" sz="2400" b="1" dirty="0"/>
           </a:p>
         </p:txBody>
       </p:sp>
@@ -6502,6 +6556,100 @@
 </file>
 
 <file path=ppt/slides/slide33.xml><?xml version="1.0" encoding="utf-8"?>
+<p:sld xmlns:a="http://schemas.openxmlformats.org/drawingml/2006/main" xmlns:r="http://schemas.openxmlformats.org/officeDocument/2006/relationships" xmlns:p="http://schemas.openxmlformats.org/presentationml/2006/main">
+  <p:cSld>
+    <p:spTree>
+      <p:nvGrpSpPr>
+        <p:cNvPr id="1" name=""/>
+        <p:cNvGrpSpPr/>
+        <p:nvPr/>
+      </p:nvGrpSpPr>
+      <p:grpSpPr>
+        <a:xfrm>
+          <a:off x="0" y="0"/>
+          <a:ext cx="0" cy="0"/>
+          <a:chOff x="0" y="0"/>
+          <a:chExt cx="0" cy="0"/>
+        </a:xfrm>
+      </p:grpSpPr>
+      <p:sp>
+        <p:nvSpPr>
+          <p:cNvPr id="2" name="Title 1"/>
+          <p:cNvSpPr>
+            <a:spLocks noGrp="1"/>
+          </p:cNvSpPr>
+          <p:nvPr>
+            <p:ph type="title"/>
+          </p:nvPr>
+        </p:nvSpPr>
+        <p:spPr/>
+        <p:txBody>
+          <a:bodyPr/>
+          <a:lstStyle/>
+          <a:p>
+            <a:pPr algn="l"/>
+            <a:r>
+              <a:rPr lang="en-US" sz="4200" dirty="0" smtClean="0"/>
+              <a:t>2. Write Tests First, then Implement</a:t>
+            </a:r>
+            <a:endParaRPr lang="en-US" sz="4200" dirty="0"/>
+          </a:p>
+        </p:txBody>
+      </p:sp>
+      <p:sp>
+        <p:nvSpPr>
+          <p:cNvPr id="3" name="Content Placeholder 2"/>
+          <p:cNvSpPr>
+            <a:spLocks noGrp="1"/>
+          </p:cNvSpPr>
+          <p:nvPr>
+            <p:ph idx="1"/>
+          </p:nvPr>
+        </p:nvSpPr>
+        <p:spPr/>
+        <p:txBody>
+          <a:bodyPr/>
+          <a:lstStyle/>
+          <a:p>
+            <a:r>
+              <a:rPr lang="en-US" sz="2400" dirty="0" smtClean="0"/>
+              <a:t>Claude Code can write comprehensive tests to catch edge cases early and give you confidence that the code works correctly.</a:t>
+            </a:r>
+          </a:p>
+          <a:p>
+            <a:r>
+              <a:rPr lang="en-US" sz="2400" b="1" dirty="0" smtClean="0"/>
+              <a:t>&gt; Write comprehensive tests for the </a:t>
+            </a:r>
+            <a:r>
+              <a:rPr lang="en-US" sz="2400" b="1" dirty="0" err="1" smtClean="0"/>
+              <a:t>OAuth</a:t>
+            </a:r>
+            <a:r>
+              <a:rPr lang="en-US" sz="2400" b="1" dirty="0" smtClean="0"/>
+              <a:t> flow - signup, login, token refresh, and error cases. Make sure they fail for now. Then, implement the </a:t>
+            </a:r>
+            <a:r>
+              <a:rPr lang="en-US" sz="2400" b="1" dirty="0" err="1" smtClean="0"/>
+              <a:t>OAuth</a:t>
+            </a:r>
+            <a:r>
+              <a:rPr lang="en-US" sz="2400" b="1" dirty="0" smtClean="0"/>
+              <a:t> system to make these tests pass.</a:t>
+            </a:r>
+            <a:endParaRPr lang="en-US" sz="2400" dirty="0"/>
+          </a:p>
+        </p:txBody>
+      </p:sp>
+    </p:spTree>
+  </p:cSld>
+  <p:clrMapOvr>
+    <a:masterClrMapping/>
+  </p:clrMapOvr>
+</p:sld>
+</file>
+
+<file path=ppt/slides/slide34.xml><?xml version="1.0" encoding="utf-8"?>
 <p:sld xmlns:a="http://schemas.openxmlformats.org/drawingml/2006/main" xmlns:r="http://schemas.openxmlformats.org/officeDocument/2006/relationships" xmlns:p="http://schemas.openxmlformats.org/presentationml/2006/main">
   <p:cSld>
     <p:spTree>
@@ -6613,7 +6761,7 @@
 </p:sld>
 </file>
 
-<file path=ppt/slides/slide34.xml><?xml version="1.0" encoding="utf-8"?>
+<file path=ppt/slides/slide35.xml><?xml version="1.0" encoding="utf-8"?>
 <p:sld xmlns:a="http://schemas.openxmlformats.org/drawingml/2006/main" xmlns:r="http://schemas.openxmlformats.org/officeDocument/2006/relationships" xmlns:p="http://schemas.openxmlformats.org/presentationml/2006/main">
   <p:cSld>
     <p:spTree>
@@ -6696,7 +6844,7 @@
 </p:sld>
 </file>
 
-<file path=ppt/slides/slide35.xml><?xml version="1.0" encoding="utf-8"?>
+<file path=ppt/slides/slide36.xml><?xml version="1.0" encoding="utf-8"?>
 <p:sld xmlns:a="http://schemas.openxmlformats.org/drawingml/2006/main" xmlns:r="http://schemas.openxmlformats.org/officeDocument/2006/relationships" xmlns:p="http://schemas.openxmlformats.org/presentationml/2006/main">
   <p:cSld>
     <p:spTree>
@@ -6811,7 +6959,7 @@
 </p:sld>
 </file>
 
-<file path=ppt/slides/slide36.xml><?xml version="1.0" encoding="utf-8"?>
+<file path=ppt/slides/slide37.xml><?xml version="1.0" encoding="utf-8"?>
 <p:sld xmlns:a="http://schemas.openxmlformats.org/drawingml/2006/main" xmlns:r="http://schemas.openxmlformats.org/officeDocument/2006/relationships" xmlns:p="http://schemas.openxmlformats.org/presentationml/2006/main">
   <p:cSld>
     <p:spTree>
@@ -6965,7 +7113,7 @@
 </p:sld>
 </file>
 
-<file path=ppt/slides/slide37.xml><?xml version="1.0" encoding="utf-8"?>
+<file path=ppt/slides/slide38.xml><?xml version="1.0" encoding="utf-8"?>
 <p:sld xmlns:a="http://schemas.openxmlformats.org/drawingml/2006/main" xmlns:r="http://schemas.openxmlformats.org/officeDocument/2006/relationships" xmlns:p="http://schemas.openxmlformats.org/presentationml/2006/main">
   <p:cSld>
     <p:spTree>
@@ -7087,7 +7235,7 @@
 </p:sld>
 </file>
 
-<file path=ppt/slides/slide38.xml><?xml version="1.0" encoding="utf-8"?>
+<file path=ppt/slides/slide39.xml><?xml version="1.0" encoding="utf-8"?>
 <p:sld xmlns:a="http://schemas.openxmlformats.org/drawingml/2006/main" xmlns:r="http://schemas.openxmlformats.org/officeDocument/2006/relationships" xmlns:p="http://schemas.openxmlformats.org/presentationml/2006/main">
   <p:cSld>
     <p:spTree>
@@ -7130,129 +7278,6 @@
           <a:noFill/>
         </p:spPr>
       </p:pic>
-    </p:spTree>
-  </p:cSld>
-  <p:clrMapOvr>
-    <a:masterClrMapping/>
-  </p:clrMapOvr>
-</p:sld>
-</file>
-
-<file path=ppt/slides/slide39.xml><?xml version="1.0" encoding="utf-8"?>
-<p:sld xmlns:a="http://schemas.openxmlformats.org/drawingml/2006/main" xmlns:r="http://schemas.openxmlformats.org/officeDocument/2006/relationships" xmlns:p="http://schemas.openxmlformats.org/presentationml/2006/main">
-  <p:cSld>
-    <p:spTree>
-      <p:nvGrpSpPr>
-        <p:cNvPr id="1" name=""/>
-        <p:cNvGrpSpPr/>
-        <p:nvPr/>
-      </p:nvGrpSpPr>
-      <p:grpSpPr>
-        <a:xfrm>
-          <a:off x="0" y="0"/>
-          <a:ext cx="0" cy="0"/>
-          <a:chOff x="0" y="0"/>
-          <a:chExt cx="0" cy="0"/>
-        </a:xfrm>
-      </p:grpSpPr>
-      <p:pic>
-        <p:nvPicPr>
-          <p:cNvPr id="1029" name="Picture 5"/>
-          <p:cNvPicPr>
-            <a:picLocks noChangeAspect="1" noChangeArrowheads="1"/>
-          </p:cNvPicPr>
-          <p:nvPr/>
-        </p:nvPicPr>
-        <p:blipFill>
-          <a:blip r:embed="rId2" cstate="print"/>
-          <a:srcRect/>
-          <a:stretch>
-            <a:fillRect/>
-          </a:stretch>
-        </p:blipFill>
-        <p:spPr bwMode="auto">
-          <a:xfrm>
-            <a:off x="450850" y="1447800"/>
-            <a:ext cx="7931150" cy="4873625"/>
-          </a:xfrm>
-          <a:prstGeom prst="rect">
-            <a:avLst/>
-          </a:prstGeom>
-          <a:noFill/>
-          <a:ln w="9525">
-            <a:noFill/>
-            <a:miter lim="800000"/>
-            <a:headEnd/>
-            <a:tailEnd/>
-          </a:ln>
-        </p:spPr>
-      </p:pic>
-      <p:sp>
-        <p:nvSpPr>
-          <p:cNvPr id="2" name="Title 1"/>
-          <p:cNvSpPr>
-            <a:spLocks noGrp="1"/>
-          </p:cNvSpPr>
-          <p:nvPr>
-            <p:ph type="title"/>
-          </p:nvPr>
-        </p:nvSpPr>
-        <p:spPr/>
-        <p:txBody>
-          <a:bodyPr/>
-          <a:lstStyle/>
-          <a:p>
-            <a:r>
-              <a:rPr lang="en-US" dirty="0" smtClean="0"/>
-              <a:t>The Harness</a:t>
-            </a:r>
-            <a:endParaRPr lang="en-US" dirty="0"/>
-          </a:p>
-        </p:txBody>
-      </p:sp>
-      <p:sp>
-        <p:nvSpPr>
-          <p:cNvPr id="7" name="Rectangle 6"/>
-          <p:cNvSpPr/>
-          <p:nvPr/>
-        </p:nvSpPr>
-        <p:spPr>
-          <a:xfrm>
-            <a:off x="6096000" y="4953000"/>
-            <a:ext cx="2667000" cy="1200329"/>
-          </a:xfrm>
-          <a:prstGeom prst="rect">
-            <a:avLst/>
-          </a:prstGeom>
-        </p:spPr>
-        <p:style>
-          <a:lnRef idx="2">
-            <a:schemeClr val="accent5"/>
-          </a:lnRef>
-          <a:fillRef idx="1">
-            <a:schemeClr val="lt1"/>
-          </a:fillRef>
-          <a:effectRef idx="0">
-            <a:schemeClr val="accent5"/>
-          </a:effectRef>
-          <a:fontRef idx="minor">
-            <a:schemeClr val="dk1"/>
-          </a:fontRef>
-        </p:style>
-        <p:txBody>
-          <a:bodyPr wrap="square">
-            <a:spAutoFit/>
-          </a:bodyPr>
-          <a:lstStyle/>
-          <a:p>
-            <a:r>
-              <a:rPr lang="en-US" dirty="0" smtClean="0"/>
-              <a:t>TUI stands for Text-based User Interface (sometimes called Terminal User Interface).</a:t>
-            </a:r>
-            <a:endParaRPr lang="en-US" dirty="0"/>
-          </a:p>
-        </p:txBody>
-      </p:sp>
     </p:spTree>
   </p:cSld>
   <p:clrMapOvr>
@@ -7387,6 +7412,129 @@
           <a:chExt cx="0" cy="0"/>
         </a:xfrm>
       </p:grpSpPr>
+      <p:pic>
+        <p:nvPicPr>
+          <p:cNvPr id="1029" name="Picture 5"/>
+          <p:cNvPicPr>
+            <a:picLocks noChangeAspect="1" noChangeArrowheads="1"/>
+          </p:cNvPicPr>
+          <p:nvPr/>
+        </p:nvPicPr>
+        <p:blipFill>
+          <a:blip r:embed="rId2" cstate="print"/>
+          <a:srcRect/>
+          <a:stretch>
+            <a:fillRect/>
+          </a:stretch>
+        </p:blipFill>
+        <p:spPr bwMode="auto">
+          <a:xfrm>
+            <a:off x="450850" y="1447800"/>
+            <a:ext cx="7931150" cy="4873625"/>
+          </a:xfrm>
+          <a:prstGeom prst="rect">
+            <a:avLst/>
+          </a:prstGeom>
+          <a:noFill/>
+          <a:ln w="9525">
+            <a:noFill/>
+            <a:miter lim="800000"/>
+            <a:headEnd/>
+            <a:tailEnd/>
+          </a:ln>
+        </p:spPr>
+      </p:pic>
+      <p:sp>
+        <p:nvSpPr>
+          <p:cNvPr id="2" name="Title 1"/>
+          <p:cNvSpPr>
+            <a:spLocks noGrp="1"/>
+          </p:cNvSpPr>
+          <p:nvPr>
+            <p:ph type="title"/>
+          </p:nvPr>
+        </p:nvSpPr>
+        <p:spPr/>
+        <p:txBody>
+          <a:bodyPr/>
+          <a:lstStyle/>
+          <a:p>
+            <a:r>
+              <a:rPr lang="en-US" dirty="0" smtClean="0"/>
+              <a:t>The Harness</a:t>
+            </a:r>
+            <a:endParaRPr lang="en-US" dirty="0"/>
+          </a:p>
+        </p:txBody>
+      </p:sp>
+      <p:sp>
+        <p:nvSpPr>
+          <p:cNvPr id="7" name="Rectangle 6"/>
+          <p:cNvSpPr/>
+          <p:nvPr/>
+        </p:nvSpPr>
+        <p:spPr>
+          <a:xfrm>
+            <a:off x="6096000" y="4953000"/>
+            <a:ext cx="2667000" cy="1200329"/>
+          </a:xfrm>
+          <a:prstGeom prst="rect">
+            <a:avLst/>
+          </a:prstGeom>
+        </p:spPr>
+        <p:style>
+          <a:lnRef idx="2">
+            <a:schemeClr val="accent5"/>
+          </a:lnRef>
+          <a:fillRef idx="1">
+            <a:schemeClr val="lt1"/>
+          </a:fillRef>
+          <a:effectRef idx="0">
+            <a:schemeClr val="accent5"/>
+          </a:effectRef>
+          <a:fontRef idx="minor">
+            <a:schemeClr val="dk1"/>
+          </a:fontRef>
+        </p:style>
+        <p:txBody>
+          <a:bodyPr wrap="square">
+            <a:spAutoFit/>
+          </a:bodyPr>
+          <a:lstStyle/>
+          <a:p>
+            <a:r>
+              <a:rPr lang="en-US" dirty="0" smtClean="0"/>
+              <a:t>TUI stands for Text-based User Interface (sometimes called Terminal User Interface).</a:t>
+            </a:r>
+            <a:endParaRPr lang="en-US" dirty="0"/>
+          </a:p>
+        </p:txBody>
+      </p:sp>
+    </p:spTree>
+  </p:cSld>
+  <p:clrMapOvr>
+    <a:masterClrMapping/>
+  </p:clrMapOvr>
+</p:sld>
+</file>
+
+<file path=ppt/slides/slide41.xml><?xml version="1.0" encoding="utf-8"?>
+<p:sld xmlns:a="http://schemas.openxmlformats.org/drawingml/2006/main" xmlns:r="http://schemas.openxmlformats.org/officeDocument/2006/relationships" xmlns:p="http://schemas.openxmlformats.org/presentationml/2006/main">
+  <p:cSld>
+    <p:spTree>
+      <p:nvGrpSpPr>
+        <p:cNvPr id="1" name=""/>
+        <p:cNvGrpSpPr/>
+        <p:nvPr/>
+      </p:nvGrpSpPr>
+      <p:grpSpPr>
+        <a:xfrm>
+          <a:off x="0" y="0"/>
+          <a:ext cx="0" cy="0"/>
+          <a:chOff x="0" y="0"/>
+          <a:chExt cx="0" cy="0"/>
+        </a:xfrm>
+      </p:grpSpPr>
       <p:sp>
         <p:nvSpPr>
           <p:cNvPr id="2" name="Title 1"/>
@@ -7450,7 +7598,7 @@
 </p:sld>
 </file>
 
-<file path=ppt/slides/slide41.xml><?xml version="1.0" encoding="utf-8"?>
+<file path=ppt/slides/slide42.xml><?xml version="1.0" encoding="utf-8"?>
 <p:sld xmlns:a="http://schemas.openxmlformats.org/drawingml/2006/main" xmlns:r="http://schemas.openxmlformats.org/officeDocument/2006/relationships" xmlns:p="http://schemas.openxmlformats.org/presentationml/2006/main">
   <p:cSld>
     <p:spTree>
@@ -7530,7 +7678,7 @@
 </p:sld>
 </file>
 
-<file path=ppt/slides/slide42.xml><?xml version="1.0" encoding="utf-8"?>
+<file path=ppt/slides/slide43.xml><?xml version="1.0" encoding="utf-8"?>
 <p:sld xmlns:a="http://schemas.openxmlformats.org/drawingml/2006/main" xmlns:r="http://schemas.openxmlformats.org/officeDocument/2006/relationships" xmlns:p="http://schemas.openxmlformats.org/presentationml/2006/main">
   <p:cSld>
     <p:spTree>
@@ -7610,7 +7758,7 @@
 </p:sld>
 </file>
 
-<file path=ppt/slides/slide43.xml><?xml version="1.0" encoding="utf-8"?>
+<file path=ppt/slides/slide44.xml><?xml version="1.0" encoding="utf-8"?>
 <p:sld xmlns:a="http://schemas.openxmlformats.org/drawingml/2006/main" xmlns:r="http://schemas.openxmlformats.org/officeDocument/2006/relationships" xmlns:p="http://schemas.openxmlformats.org/presentationml/2006/main">
   <p:cSld>
     <p:spTree>
@@ -7690,7 +7838,7 @@
 </p:sld>
 </file>
 
-<file path=ppt/slides/slide44.xml><?xml version="1.0" encoding="utf-8"?>
+<file path=ppt/slides/slide45.xml><?xml version="1.0" encoding="utf-8"?>
 <p:sld xmlns:a="http://schemas.openxmlformats.org/drawingml/2006/main" xmlns:r="http://schemas.openxmlformats.org/officeDocument/2006/relationships" xmlns:p="http://schemas.openxmlformats.org/presentationml/2006/main">
   <p:cSld>
     <p:spTree>
@@ -7770,7 +7918,7 @@
 </p:sld>
 </file>
 
-<file path=ppt/slides/slide45.xml><?xml version="1.0" encoding="utf-8"?>
+<file path=ppt/slides/slide46.xml><?xml version="1.0" encoding="utf-8"?>
 <p:sld xmlns:a="http://schemas.openxmlformats.org/drawingml/2006/main" xmlns:r="http://schemas.openxmlformats.org/officeDocument/2006/relationships" xmlns:p="http://schemas.openxmlformats.org/presentationml/2006/main">
   <p:cSld>
     <p:spTree>
@@ -7821,158 +7969,6 @@
 </p:sld>
 </file>
 
-<file path=ppt/slides/slide46.xml><?xml version="1.0" encoding="utf-8"?>
-<p:sld xmlns:a="http://schemas.openxmlformats.org/drawingml/2006/main" xmlns:r="http://schemas.openxmlformats.org/officeDocument/2006/relationships" xmlns:p="http://schemas.openxmlformats.org/presentationml/2006/main">
-  <p:cSld>
-    <p:spTree>
-      <p:nvGrpSpPr>
-        <p:cNvPr id="1" name=""/>
-        <p:cNvGrpSpPr/>
-        <p:nvPr/>
-      </p:nvGrpSpPr>
-      <p:grpSpPr>
-        <a:xfrm>
-          <a:off x="0" y="0"/>
-          <a:ext cx="0" cy="0"/>
-          <a:chOff x="0" y="0"/>
-          <a:chExt cx="0" cy="0"/>
-        </a:xfrm>
-      </p:grpSpPr>
-      <p:sp>
-        <p:nvSpPr>
-          <p:cNvPr id="2" name="Title 1"/>
-          <p:cNvSpPr>
-            <a:spLocks noGrp="1"/>
-          </p:cNvSpPr>
-          <p:nvPr>
-            <p:ph type="title"/>
-          </p:nvPr>
-        </p:nvSpPr>
-        <p:spPr/>
-        <p:txBody>
-          <a:bodyPr/>
-          <a:lstStyle/>
-          <a:p>
-            <a:pPr algn="l"/>
-            <a:r>
-              <a:rPr lang="en-US" dirty="0" smtClean="0"/>
-              <a:t>1. Install a Skill</a:t>
-            </a:r>
-            <a:endParaRPr lang="en-US" dirty="0"/>
-          </a:p>
-        </p:txBody>
-      </p:sp>
-      <p:sp>
-        <p:nvSpPr>
-          <p:cNvPr id="3" name="Content Placeholder 2"/>
-          <p:cNvSpPr>
-            <a:spLocks noGrp="1"/>
-          </p:cNvSpPr>
-          <p:nvPr>
-            <p:ph idx="1"/>
-          </p:nvPr>
-        </p:nvSpPr>
-        <p:spPr/>
-        <p:txBody>
-          <a:bodyPr/>
-          <a:lstStyle/>
-          <a:p>
-            <a:r>
-              <a:rPr lang="en-US" sz="2400" dirty="0" err="1" smtClean="0"/>
-              <a:t>claude</a:t>
-            </a:r>
-            <a:endParaRPr lang="en-US" sz="2400" dirty="0" smtClean="0"/>
-          </a:p>
-          <a:p>
-            <a:r>
-              <a:rPr lang="en-US" sz="2400" dirty="0" smtClean="0"/>
-              <a:t>/</a:t>
-            </a:r>
-            <a:r>
-              <a:rPr lang="en-US" sz="2400" dirty="0" err="1" smtClean="0"/>
-              <a:t>plugin</a:t>
-            </a:r>
-            <a:r>
-              <a:rPr lang="en-US" sz="2400" dirty="0" smtClean="0"/>
-              <a:t> </a:t>
-            </a:r>
-            <a:r>
-              <a:rPr lang="en-US" sz="2400" b="1" dirty="0" smtClean="0"/>
-              <a:t>marketplace</a:t>
-            </a:r>
-            <a:r>
-              <a:rPr lang="en-US" sz="2400" dirty="0" smtClean="0"/>
-              <a:t> add </a:t>
-            </a:r>
-            <a:r>
-              <a:rPr lang="en-US" sz="2400" i="1" dirty="0" smtClean="0"/>
-              <a:t>Imbad0202/academic-research-skills</a:t>
-            </a:r>
-          </a:p>
-          <a:p>
-            <a:r>
-              <a:rPr lang="en-US" sz="2400" dirty="0" smtClean="0"/>
-              <a:t>/</a:t>
-            </a:r>
-            <a:r>
-              <a:rPr lang="en-US" sz="2400" dirty="0" err="1" smtClean="0"/>
-              <a:t>plugin</a:t>
-            </a:r>
-            <a:r>
-              <a:rPr lang="en-US" sz="2400" dirty="0" smtClean="0"/>
-              <a:t> </a:t>
-            </a:r>
-            <a:r>
-              <a:rPr lang="en-US" sz="2400" b="1" dirty="0" smtClean="0"/>
-              <a:t>install</a:t>
-            </a:r>
-            <a:r>
-              <a:rPr lang="en-US" sz="2400" dirty="0" smtClean="0"/>
-              <a:t> </a:t>
-            </a:r>
-            <a:r>
-              <a:rPr lang="en-US" sz="2400" i="1" dirty="0" smtClean="0"/>
-              <a:t>academic-research-skills</a:t>
-            </a:r>
-          </a:p>
-          <a:p>
-            <a:r>
-              <a:rPr lang="en-US" sz="2400" dirty="0" smtClean="0"/>
-              <a:t>/reload-</a:t>
-            </a:r>
-            <a:r>
-              <a:rPr lang="en-US" sz="2400" dirty="0" err="1" smtClean="0"/>
-              <a:t>plugins</a:t>
-            </a:r>
-            <a:endParaRPr lang="en-US" sz="2400" dirty="0" smtClean="0"/>
-          </a:p>
-          <a:p>
-            <a:r>
-              <a:rPr lang="en-US" sz="2400" dirty="0" smtClean="0"/>
-              <a:t>/academic-research-</a:t>
-            </a:r>
-            <a:r>
-              <a:rPr lang="en-US" sz="2400" dirty="0" err="1" smtClean="0"/>
-              <a:t>skills:ars</a:t>
-            </a:r>
-            <a:r>
-              <a:rPr lang="en-US" sz="2400" smtClean="0"/>
-              <a:t>-lit-review</a:t>
-            </a:r>
-          </a:p>
-          <a:p>
-            <a:endParaRPr lang="en-US" sz="2400" smtClean="0"/>
-          </a:p>
-        </p:txBody>
-      </p:sp>
-    </p:spTree>
-  </p:cSld>
-  <p:clrMapOvr>
-    <a:masterClrMapping/>
-  </p:clrMapOvr>
-</p:sld>
-</file>
-
 <file path=ppt/slides/slide47.xml><?xml version="1.0" encoding="utf-8"?>
 <p:sld xmlns:a="http://schemas.openxmlformats.org/drawingml/2006/main" xmlns:r="http://schemas.openxmlformats.org/officeDocument/2006/relationships" xmlns:p="http://schemas.openxmlformats.org/presentationml/2006/main">
   <p:cSld>
@@ -8008,7 +8004,7 @@
             <a:pPr algn="l"/>
             <a:r>
               <a:rPr lang="en-US" dirty="0" smtClean="0"/>
-              <a:t>2. Install a Viewer</a:t>
+              <a:t>1. Install a Skill</a:t>
             </a:r>
             <a:endParaRPr lang="en-US" dirty="0"/>
           </a:p>
@@ -8030,41 +8026,90 @@
           <a:lstStyle/>
           <a:p>
             <a:r>
-              <a:rPr lang="en-US" dirty="0" err="1" smtClean="0"/>
-              <a:t>npx</a:t>
-            </a:r>
-            <a:r>
-              <a:rPr lang="en-US" dirty="0" smtClean="0"/>
-              <a:t> @</a:t>
-            </a:r>
-            <a:r>
-              <a:rPr lang="en-US" dirty="0" err="1" smtClean="0"/>
-              <a:t>kimuson</a:t>
-            </a:r>
-            <a:r>
-              <a:rPr lang="en-US" dirty="0" smtClean="0"/>
+              <a:rPr lang="en-US" sz="2400" dirty="0" err="1" smtClean="0"/>
+              <a:t>claude</a:t>
+            </a:r>
+            <a:endParaRPr lang="en-US" sz="2400" dirty="0" smtClean="0"/>
+          </a:p>
+          <a:p>
+            <a:r>
+              <a:rPr lang="en-US" sz="2400" dirty="0" smtClean="0"/>
               <a:t>/</a:t>
             </a:r>
             <a:r>
-              <a:rPr lang="en-US" dirty="0" err="1" smtClean="0"/>
-              <a:t>claude</a:t>
-            </a:r>
-            <a:r>
-              <a:rPr lang="en-US" dirty="0" smtClean="0"/>
-              <a:t>-code-viewer</a:t>
-            </a:r>
-          </a:p>
-          <a:p>
-            <a:r>
-              <a:rPr lang="en-US" smtClean="0">
-                <a:hlinkClick r:id="rId2"/>
-              </a:rPr>
-              <a:t>http://localhost:3000/</a:t>
-            </a:r>
-            <a:endParaRPr lang="en-US" smtClean="0"/>
-          </a:p>
-          <a:p>
-            <a:endParaRPr lang="en-US" dirty="0"/>
+              <a:rPr lang="en-US" sz="2400" dirty="0" err="1" smtClean="0"/>
+              <a:t>plugin</a:t>
+            </a:r>
+            <a:r>
+              <a:rPr lang="en-US" sz="2400" dirty="0" smtClean="0"/>
+              <a:t> </a:t>
+            </a:r>
+            <a:r>
+              <a:rPr lang="en-US" sz="2400" b="1" dirty="0" smtClean="0"/>
+              <a:t>marketplace</a:t>
+            </a:r>
+            <a:r>
+              <a:rPr lang="en-US" sz="2400" dirty="0" smtClean="0"/>
+              <a:t> add </a:t>
+            </a:r>
+            <a:r>
+              <a:rPr lang="en-US" sz="2400" i="1" dirty="0" smtClean="0"/>
+              <a:t>Imbad0202/academic-research-skills</a:t>
+            </a:r>
+          </a:p>
+          <a:p>
+            <a:r>
+              <a:rPr lang="en-US" sz="2400" dirty="0" smtClean="0"/>
+              <a:t>/</a:t>
+            </a:r>
+            <a:r>
+              <a:rPr lang="en-US" sz="2400" dirty="0" err="1" smtClean="0"/>
+              <a:t>plugin</a:t>
+            </a:r>
+            <a:r>
+              <a:rPr lang="en-US" sz="2400" dirty="0" smtClean="0"/>
+              <a:t> </a:t>
+            </a:r>
+            <a:r>
+              <a:rPr lang="en-US" sz="2400" b="1" dirty="0" smtClean="0"/>
+              <a:t>install</a:t>
+            </a:r>
+            <a:r>
+              <a:rPr lang="en-US" sz="2400" dirty="0" smtClean="0"/>
+              <a:t> </a:t>
+            </a:r>
+            <a:r>
+              <a:rPr lang="en-US" sz="2400" i="1" dirty="0" smtClean="0"/>
+              <a:t>academic-research-skills</a:t>
+            </a:r>
+          </a:p>
+          <a:p>
+            <a:r>
+              <a:rPr lang="en-US" sz="2400" dirty="0" smtClean="0"/>
+              <a:t>/reload-</a:t>
+            </a:r>
+            <a:r>
+              <a:rPr lang="en-US" sz="2400" dirty="0" err="1" smtClean="0"/>
+              <a:t>plugins</a:t>
+            </a:r>
+            <a:endParaRPr lang="en-US" sz="2400" dirty="0" smtClean="0"/>
+          </a:p>
+          <a:p>
+            <a:r>
+              <a:rPr lang="en-US" sz="2400" dirty="0" smtClean="0"/>
+              <a:t>/academic-research-</a:t>
+            </a:r>
+            <a:r>
+              <a:rPr lang="en-US" sz="2400" dirty="0" err="1" smtClean="0"/>
+              <a:t>skills:ars</a:t>
+            </a:r>
+            <a:r>
+              <a:rPr lang="en-US" sz="2400" smtClean="0"/>
+              <a:t>-lit-review</a:t>
+            </a:r>
+          </a:p>
+          <a:p>
+            <a:endParaRPr lang="en-US" sz="2400" smtClean="0"/>
           </a:p>
         </p:txBody>
       </p:sp>
@@ -8111,83 +8156,63 @@
             <a:pPr algn="l"/>
             <a:r>
               <a:rPr lang="en-US" dirty="0" smtClean="0"/>
-              <a:t>3. Add </a:t>
+              <a:t>2. Install a Viewer</a:t>
+            </a:r>
+            <a:endParaRPr lang="en-US" dirty="0"/>
+          </a:p>
+        </p:txBody>
+      </p:sp>
+      <p:sp>
+        <p:nvSpPr>
+          <p:cNvPr id="3" name="Content Placeholder 2"/>
+          <p:cNvSpPr>
+            <a:spLocks noGrp="1"/>
+          </p:cNvSpPr>
+          <p:nvPr>
+            <p:ph idx="1"/>
+          </p:nvPr>
+        </p:nvSpPr>
+        <p:spPr/>
+        <p:txBody>
+          <a:bodyPr/>
+          <a:lstStyle/>
+          <a:p>
+            <a:r>
+              <a:rPr lang="en-US" dirty="0" err="1" smtClean="0"/>
+              <a:t>npx</a:t>
             </a:r>
             <a:r>
               <a:rPr lang="en-US" dirty="0" smtClean="0"/>
-              <a:t>Maintainability Sensors</a:t>
-            </a:r>
-            <a:endParaRPr lang="en-US" dirty="0"/>
-          </a:p>
-        </p:txBody>
-      </p:sp>
-      <p:sp>
-        <p:nvSpPr>
-          <p:cNvPr id="3" name="Content Placeholder 2"/>
-          <p:cNvSpPr>
-            <a:spLocks noGrp="1"/>
-          </p:cNvSpPr>
-          <p:nvPr>
-            <p:ph idx="1"/>
-          </p:nvPr>
-        </p:nvSpPr>
-        <p:spPr/>
-        <p:txBody>
-          <a:bodyPr/>
-          <a:lstStyle/>
-          <a:p>
-            <a:r>
-              <a:rPr lang="en-US" sz="2400" dirty="0" smtClean="0">
+              <a:t> @</a:t>
+            </a:r>
+            <a:r>
+              <a:rPr lang="en-US" dirty="0" err="1" smtClean="0"/>
+              <a:t>kimuson</a:t>
+            </a:r>
+            <a:r>
+              <a:rPr lang="en-US" dirty="0" smtClean="0"/>
+              <a:t>/</a:t>
+            </a:r>
+            <a:r>
+              <a:rPr lang="en-US" dirty="0" err="1" smtClean="0"/>
+              <a:t>claude</a:t>
+            </a:r>
+            <a:r>
+              <a:rPr lang="en-US" dirty="0" smtClean="0"/>
+              <a:t>-code-viewer</a:t>
+            </a:r>
+          </a:p>
+          <a:p>
+            <a:r>
+              <a:rPr lang="en-US" smtClean="0">
                 <a:hlinkClick r:id="rId2"/>
               </a:rPr>
-              <a:t>https://</a:t>
-            </a:r>
-            <a:r>
-              <a:rPr lang="en-US" sz="2400" dirty="0" smtClean="0">
-                <a:hlinkClick r:id="rId2"/>
-              </a:rPr>
-              <a:t>martinfowler.com/articles/sensors-for-coding-agents.html</a:t>
-            </a:r>
-            <a:endParaRPr lang="en-US" sz="2400" dirty="0" smtClean="0"/>
-          </a:p>
-          <a:p>
-            <a:r>
-              <a:rPr lang="en-US" sz="2400" dirty="0" smtClean="0">
-                <a:hlinkClick r:id="rId3"/>
-              </a:rPr>
-              <a:t>https://</a:t>
-            </a:r>
-            <a:r>
-              <a:rPr lang="en-US" sz="2400" dirty="0" smtClean="0">
-                <a:hlinkClick r:id="rId3"/>
-              </a:rPr>
-              <a:t>github.com/birgitta410/sensors-cli</a:t>
-            </a:r>
-            <a:endParaRPr lang="en-US" sz="2400" dirty="0" smtClean="0"/>
-          </a:p>
-          <a:p>
-            <a:r>
-              <a:rPr lang="en-US" sz="2400" dirty="0" smtClean="0"/>
-              <a:t>Internal quality problems affect AI agents in similar ways that they affect human </a:t>
-            </a:r>
-            <a:r>
-              <a:rPr lang="en-US" sz="2400" dirty="0" smtClean="0"/>
-              <a:t>developers.</a:t>
-            </a:r>
-          </a:p>
-          <a:p>
-            <a:r>
-              <a:rPr lang="en-US" sz="2400" dirty="0" smtClean="0"/>
-              <a:t>An </a:t>
-            </a:r>
-            <a:r>
-              <a:rPr lang="en-US" sz="2400" dirty="0" smtClean="0"/>
-              <a:t>agent working in a tangled codebase might look in the wrong place for an existing implementation, create inconsistencies because it has not noticed a duplicate, or be forced to load more context than a task should require.</a:t>
-            </a:r>
-            <a:endParaRPr lang="en-US" sz="2400" dirty="0" smtClean="0"/>
-          </a:p>
-          <a:p>
-            <a:endParaRPr lang="en-US" sz="2400" dirty="0"/>
+              <a:t>http://localhost:3000/</a:t>
+            </a:r>
+            <a:endParaRPr lang="en-US" smtClean="0"/>
+          </a:p>
+          <a:p>
+            <a:endParaRPr lang="en-US" dirty="0"/>
           </a:p>
         </p:txBody>
       </p:sp>
@@ -8200,6 +8225,181 @@
 </file>
 
 <file path=ppt/slides/slide49.xml><?xml version="1.0" encoding="utf-8"?>
+<p:sld xmlns:a="http://schemas.openxmlformats.org/drawingml/2006/main" xmlns:r="http://schemas.openxmlformats.org/officeDocument/2006/relationships" xmlns:p="http://schemas.openxmlformats.org/presentationml/2006/main">
+  <p:cSld>
+    <p:spTree>
+      <p:nvGrpSpPr>
+        <p:cNvPr id="1" name=""/>
+        <p:cNvGrpSpPr/>
+        <p:nvPr/>
+      </p:nvGrpSpPr>
+      <p:grpSpPr>
+        <a:xfrm>
+          <a:off x="0" y="0"/>
+          <a:ext cx="0" cy="0"/>
+          <a:chOff x="0" y="0"/>
+          <a:chExt cx="0" cy="0"/>
+        </a:xfrm>
+      </p:grpSpPr>
+      <p:sp>
+        <p:nvSpPr>
+          <p:cNvPr id="2" name="Title 1"/>
+          <p:cNvSpPr>
+            <a:spLocks noGrp="1"/>
+          </p:cNvSpPr>
+          <p:nvPr>
+            <p:ph type="title"/>
+          </p:nvPr>
+        </p:nvSpPr>
+        <p:spPr/>
+        <p:txBody>
+          <a:bodyPr/>
+          <a:lstStyle/>
+          <a:p>
+            <a:pPr algn="l"/>
+            <a:r>
+              <a:rPr lang="en-US" dirty="0" smtClean="0"/>
+              <a:t>3. Add Maintainability Sensors</a:t>
+            </a:r>
+            <a:endParaRPr lang="en-US" dirty="0"/>
+          </a:p>
+        </p:txBody>
+      </p:sp>
+      <p:sp>
+        <p:nvSpPr>
+          <p:cNvPr id="3" name="Content Placeholder 2"/>
+          <p:cNvSpPr>
+            <a:spLocks noGrp="1"/>
+          </p:cNvSpPr>
+          <p:nvPr>
+            <p:ph idx="1"/>
+          </p:nvPr>
+        </p:nvSpPr>
+        <p:spPr/>
+        <p:txBody>
+          <a:bodyPr/>
+          <a:lstStyle/>
+          <a:p>
+            <a:r>
+              <a:rPr lang="en-US" sz="2400" dirty="0" smtClean="0">
+                <a:hlinkClick r:id="rId2"/>
+              </a:rPr>
+              <a:t>https://martinfowler.com/articles/sensors-for-coding-agents.html</a:t>
+            </a:r>
+            <a:endParaRPr lang="en-US" sz="2400" dirty="0" smtClean="0"/>
+          </a:p>
+          <a:p>
+            <a:r>
+              <a:rPr lang="en-US" sz="2400" dirty="0" smtClean="0">
+                <a:hlinkClick r:id="rId3"/>
+              </a:rPr>
+              <a:t>https://github.com/birgitta410/sensors-cli</a:t>
+            </a:r>
+            <a:endParaRPr lang="en-US" sz="2400" dirty="0" smtClean="0"/>
+          </a:p>
+          <a:p>
+            <a:r>
+              <a:rPr lang="en-US" sz="2400" dirty="0" smtClean="0"/>
+              <a:t>Internal quality problems affect AI agents in similar ways that they affect human developers.</a:t>
+            </a:r>
+          </a:p>
+          <a:p>
+            <a:r>
+              <a:rPr lang="en-US" sz="2400" dirty="0" smtClean="0"/>
+              <a:t>An agent working in a tangled codebase might look in the wrong place for an existing implementation, create inconsistencies because it has not noticed a duplicate, or be forced to load more context than a task should require.</a:t>
+            </a:r>
+          </a:p>
+          <a:p>
+            <a:endParaRPr lang="en-US" sz="2400" dirty="0"/>
+          </a:p>
+        </p:txBody>
+      </p:sp>
+    </p:spTree>
+  </p:cSld>
+  <p:clrMapOvr>
+    <a:masterClrMapping/>
+  </p:clrMapOvr>
+</p:sld>
+</file>
+
+<file path=ppt/slides/slide5.xml><?xml version="1.0" encoding="utf-8"?>
+<p:sld xmlns:a="http://schemas.openxmlformats.org/drawingml/2006/main" xmlns:r="http://schemas.openxmlformats.org/officeDocument/2006/relationships" xmlns:p="http://schemas.openxmlformats.org/presentationml/2006/main">
+  <p:cSld>
+    <p:spTree>
+      <p:nvGrpSpPr>
+        <p:cNvPr id="1" name=""/>
+        <p:cNvGrpSpPr/>
+        <p:nvPr/>
+      </p:nvGrpSpPr>
+      <p:grpSpPr>
+        <a:xfrm>
+          <a:off x="0" y="0"/>
+          <a:ext cx="0" cy="0"/>
+          <a:chOff x="0" y="0"/>
+          <a:chExt cx="0" cy="0"/>
+        </a:xfrm>
+      </p:grpSpPr>
+      <p:sp>
+        <p:nvSpPr>
+          <p:cNvPr id="2" name="Title 1"/>
+          <p:cNvSpPr>
+            <a:spLocks noGrp="1"/>
+          </p:cNvSpPr>
+          <p:nvPr>
+            <p:ph type="title"/>
+          </p:nvPr>
+        </p:nvSpPr>
+        <p:spPr/>
+        <p:txBody>
+          <a:bodyPr/>
+          <a:lstStyle/>
+          <a:p>
+            <a:pPr algn="l"/>
+            <a:r>
+              <a:rPr lang="en-US" dirty="0" smtClean="0"/>
+              <a:t>1. Buy Claude Pro Plan</a:t>
+            </a:r>
+            <a:endParaRPr lang="en-US" dirty="0"/>
+          </a:p>
+        </p:txBody>
+      </p:sp>
+      <p:sp>
+        <p:nvSpPr>
+          <p:cNvPr id="3" name="Content Placeholder 2"/>
+          <p:cNvSpPr>
+            <a:spLocks noGrp="1"/>
+          </p:cNvSpPr>
+          <p:nvPr>
+            <p:ph idx="1"/>
+          </p:nvPr>
+        </p:nvSpPr>
+        <p:spPr/>
+        <p:txBody>
+          <a:bodyPr/>
+          <a:lstStyle/>
+          <a:p>
+            <a:r>
+              <a:rPr lang="en-US" dirty="0" smtClean="0">
+                <a:hlinkClick r:id="rId2"/>
+              </a:rPr>
+              <a:t>https://claude.com/pricing</a:t>
+            </a:r>
+            <a:endParaRPr lang="en-US" dirty="0" smtClean="0"/>
+          </a:p>
+          <a:p>
+            <a:endParaRPr lang="en-US" dirty="0"/>
+          </a:p>
+        </p:txBody>
+      </p:sp>
+    </p:spTree>
+  </p:cSld>
+  <p:clrMapOvr>
+    <a:masterClrMapping/>
+  </p:clrMapOvr>
+</p:sld>
+</file>
+
+<file path=ppt/slides/slide50.xml><?xml version="1.0" encoding="utf-8"?>
 <p:sld xmlns:a="http://schemas.openxmlformats.org/drawingml/2006/main" xmlns:r="http://schemas.openxmlformats.org/officeDocument/2006/relationships" xmlns:p="http://schemas.openxmlformats.org/presentationml/2006/main">
   <p:cSld>
     <p:spTree>
@@ -8250,7 +8450,7 @@
 </p:sld>
 </file>
 
-<file path=ppt/slides/slide5.xml><?xml version="1.0" encoding="utf-8"?>
+<file path=ppt/slides/slide51.xml><?xml version="1.0" encoding="utf-8"?>
 <p:sld xmlns:a="http://schemas.openxmlformats.org/drawingml/2006/main" xmlns:r="http://schemas.openxmlformats.org/officeDocument/2006/relationships" xmlns:p="http://schemas.openxmlformats.org/presentationml/2006/main">
   <p:cSld>
     <p:spTree>
@@ -8282,10 +8482,17 @@
           <a:bodyPr/>
           <a:lstStyle/>
           <a:p>
-            <a:pPr algn="l"/>
-            <a:r>
-              <a:rPr lang="en-US" dirty="0" smtClean="0"/>
-              <a:t>1. Buy Claude Pro Plan</a:t>
+            <a:r>
+              <a:rPr lang="fr-FR" dirty="0" smtClean="0"/>
+              <a:t>Chat vs. </a:t>
+            </a:r>
+            <a:r>
+              <a:rPr lang="fr-FR" dirty="0" err="1" smtClean="0"/>
+              <a:t>Cowork</a:t>
+            </a:r>
+            <a:r>
+              <a:rPr lang="fr-FR" dirty="0" smtClean="0"/>
+              <a:t> vs. Claude Code</a:t>
             </a:r>
             <a:endParaRPr lang="en-US" dirty="0"/>
           </a:p>
@@ -8307,15 +8514,90 @@
           <a:lstStyle/>
           <a:p>
             <a:r>
-              <a:rPr lang="en-US" dirty="0" smtClean="0">
-                <a:hlinkClick r:id="rId2"/>
+              <a:rPr lang="en-US" sz="1800" i="1" dirty="0" smtClean="0">
+                <a:solidFill>
+                  <a:srgbClr val="C00000"/>
+                </a:solidFill>
               </a:rPr>
-              <a:t>https://claude.com/pricing</a:t>
-            </a:r>
-            <a:endParaRPr lang="en-US" dirty="0" smtClean="0"/>
-          </a:p>
-          <a:p>
-            <a:endParaRPr lang="en-US" dirty="0"/>
+              <a:t>Chat</a:t>
+            </a:r>
+            <a:r>
+              <a:rPr lang="en-US" sz="1800" dirty="0" smtClean="0"/>
+              <a:t> is for quick questions, brainstorming, iterative drafting, and working through problems back and forth.</a:t>
+            </a:r>
+          </a:p>
+          <a:p>
+            <a:r>
+              <a:rPr lang="en-US" sz="1800" i="1" dirty="0" err="1" smtClean="0">
+                <a:solidFill>
+                  <a:srgbClr val="C00000"/>
+                </a:solidFill>
+              </a:rPr>
+              <a:t>Cowork</a:t>
+            </a:r>
+            <a:r>
+              <a:rPr lang="en-US" sz="1800" dirty="0" smtClean="0"/>
+              <a:t> is for complex or sustained work—research, analysis, and producing finished documents and deliverables—where Claude needs room to pull from multiple sources and see things through.</a:t>
+            </a:r>
+          </a:p>
+          <a:p>
+            <a:r>
+              <a:rPr lang="en-US" sz="1800" dirty="0" err="1" smtClean="0"/>
+              <a:t>Cowork</a:t>
+            </a:r>
+            <a:r>
+              <a:rPr lang="en-US" sz="1800" dirty="0" smtClean="0"/>
+              <a:t> = </a:t>
+            </a:r>
+            <a:r>
+              <a:rPr lang="en-US" sz="1800" i="1" dirty="0" smtClean="0">
+                <a:solidFill>
+                  <a:srgbClr val="C00000"/>
+                </a:solidFill>
+              </a:rPr>
+              <a:t>desktop app</a:t>
+            </a:r>
+            <a:r>
+              <a:rPr lang="en-US" sz="1800" dirty="0" smtClean="0"/>
+              <a:t> + local files + connectors + browser control + computer use + autonomous multi-step execution + scheduling + mobile dispatch. Mobile dispatch lets you kick off or steer a </a:t>
+            </a:r>
+            <a:r>
+              <a:rPr lang="en-US" sz="1800" dirty="0" err="1" smtClean="0"/>
+              <a:t>Cowork</a:t>
+            </a:r>
+            <a:r>
+              <a:rPr lang="en-US" sz="1800" dirty="0" smtClean="0"/>
+              <a:t> task from your phone, while the actual work runs on your desktop.</a:t>
+            </a:r>
+          </a:p>
+          <a:p>
+            <a:r>
+              <a:rPr lang="en-US" sz="1800" dirty="0" smtClean="0"/>
+              <a:t>Web chat answers questions turn-by-turn with your uploaded files and connectors, while </a:t>
+            </a:r>
+            <a:r>
+              <a:rPr lang="en-US" sz="1800" dirty="0" err="1" smtClean="0"/>
+              <a:t>Cowork</a:t>
+            </a:r>
+            <a:r>
+              <a:rPr lang="en-US" sz="1800" dirty="0" smtClean="0"/>
+              <a:t> takes a goal and autonomously executes multi-step work across your local files, apps, browser, and connectors on the desktop.</a:t>
+            </a:r>
+          </a:p>
+          <a:p>
+            <a:r>
+              <a:rPr lang="en-US" sz="1800" i="1" dirty="0" smtClean="0">
+                <a:solidFill>
+                  <a:srgbClr val="C00000"/>
+                </a:solidFill>
+              </a:rPr>
+              <a:t>Claude Code</a:t>
+            </a:r>
+            <a:r>
+              <a:rPr lang="en-US" sz="1800" dirty="0" smtClean="0"/>
+              <a:t> is for building software—writing, testing, running, and deploying code, with access to your file system and development tools.</a:t>
+            </a:r>
+            <a:endParaRPr lang="en-US" sz="1800" dirty="0"/>
           </a:p>
         </p:txBody>
       </p:sp>
@@ -8327,166 +8609,7 @@
 </p:sld>
 </file>
 
-<file path=ppt/slides/slide50.xml><?xml version="1.0" encoding="utf-8"?>
-<p:sld xmlns:a="http://schemas.openxmlformats.org/drawingml/2006/main" xmlns:r="http://schemas.openxmlformats.org/officeDocument/2006/relationships" xmlns:p="http://schemas.openxmlformats.org/presentationml/2006/main">
-  <p:cSld>
-    <p:spTree>
-      <p:nvGrpSpPr>
-        <p:cNvPr id="1" name=""/>
-        <p:cNvGrpSpPr/>
-        <p:nvPr/>
-      </p:nvGrpSpPr>
-      <p:grpSpPr>
-        <a:xfrm>
-          <a:off x="0" y="0"/>
-          <a:ext cx="0" cy="0"/>
-          <a:chOff x="0" y="0"/>
-          <a:chExt cx="0" cy="0"/>
-        </a:xfrm>
-      </p:grpSpPr>
-      <p:sp>
-        <p:nvSpPr>
-          <p:cNvPr id="2" name="Title 1"/>
-          <p:cNvSpPr>
-            <a:spLocks noGrp="1"/>
-          </p:cNvSpPr>
-          <p:nvPr>
-            <p:ph type="title"/>
-          </p:nvPr>
-        </p:nvSpPr>
-        <p:spPr/>
-        <p:txBody>
-          <a:bodyPr/>
-          <a:lstStyle/>
-          <a:p>
-            <a:r>
-              <a:rPr lang="fr-FR" dirty="0" smtClean="0"/>
-              <a:t>Chat vs. </a:t>
-            </a:r>
-            <a:r>
-              <a:rPr lang="fr-FR" dirty="0" err="1" smtClean="0"/>
-              <a:t>Cowork</a:t>
-            </a:r>
-            <a:r>
-              <a:rPr lang="fr-FR" dirty="0" smtClean="0"/>
-              <a:t> vs. Claude Code</a:t>
-            </a:r>
-            <a:endParaRPr lang="en-US" dirty="0"/>
-          </a:p>
-        </p:txBody>
-      </p:sp>
-      <p:sp>
-        <p:nvSpPr>
-          <p:cNvPr id="3" name="Content Placeholder 2"/>
-          <p:cNvSpPr>
-            <a:spLocks noGrp="1"/>
-          </p:cNvSpPr>
-          <p:nvPr>
-            <p:ph idx="1"/>
-          </p:nvPr>
-        </p:nvSpPr>
-        <p:spPr/>
-        <p:txBody>
-          <a:bodyPr/>
-          <a:lstStyle/>
-          <a:p>
-            <a:r>
-              <a:rPr lang="en-US" sz="1800" i="1" dirty="0" smtClean="0">
-                <a:solidFill>
-                  <a:srgbClr val="C00000"/>
-                </a:solidFill>
-              </a:rPr>
-              <a:t>Chat</a:t>
-            </a:r>
-            <a:r>
-              <a:rPr lang="en-US" sz="1800" dirty="0" smtClean="0"/>
-              <a:t> is for quick questions, brainstorming, iterative drafting, and working through problems back and forth.</a:t>
-            </a:r>
-          </a:p>
-          <a:p>
-            <a:r>
-              <a:rPr lang="en-US" sz="1800" i="1" dirty="0" err="1" smtClean="0">
-                <a:solidFill>
-                  <a:srgbClr val="C00000"/>
-                </a:solidFill>
-              </a:rPr>
-              <a:t>Cowork</a:t>
-            </a:r>
-            <a:r>
-              <a:rPr lang="en-US" sz="1800" dirty="0" smtClean="0"/>
-              <a:t> is for complex or sustained work—research, analysis, and producing finished documents and deliverables—where Claude needs room to pull from multiple sources and see things through.</a:t>
-            </a:r>
-          </a:p>
-          <a:p>
-            <a:r>
-              <a:rPr lang="en-US" sz="1800" dirty="0" err="1" smtClean="0"/>
-              <a:t>Cowork</a:t>
-            </a:r>
-            <a:r>
-              <a:rPr lang="en-US" sz="1800" dirty="0" smtClean="0"/>
-              <a:t> = </a:t>
-            </a:r>
-            <a:r>
-              <a:rPr lang="en-US" sz="1800" i="1" dirty="0" smtClean="0">
-                <a:solidFill>
-                  <a:srgbClr val="C00000"/>
-                </a:solidFill>
-              </a:rPr>
-              <a:t>desktop app</a:t>
-            </a:r>
-            <a:r>
-              <a:rPr lang="en-US" sz="1800" dirty="0" smtClean="0"/>
-              <a:t> + local files + connectors + browser control + computer use + autonomous multi-step execution + scheduling + mobile dispatch. Mobile dispatch lets you kick off or steer a </a:t>
-            </a:r>
-            <a:r>
-              <a:rPr lang="en-US" sz="1800" dirty="0" err="1" smtClean="0"/>
-              <a:t>Cowork</a:t>
-            </a:r>
-            <a:r>
-              <a:rPr lang="en-US" sz="1800" dirty="0" smtClean="0"/>
-              <a:t> task from your phone, while the actual work runs on your desktop.</a:t>
-            </a:r>
-          </a:p>
-          <a:p>
-            <a:r>
-              <a:rPr lang="en-US" sz="1800" dirty="0" smtClean="0"/>
-              <a:t>Web chat answers questions turn-by-turn with your uploaded files and connectors, while </a:t>
-            </a:r>
-            <a:r>
-              <a:rPr lang="en-US" sz="1800" dirty="0" err="1" smtClean="0"/>
-              <a:t>Cowork</a:t>
-            </a:r>
-            <a:r>
-              <a:rPr lang="en-US" sz="1800" dirty="0" smtClean="0"/>
-              <a:t> takes a goal and autonomously executes multi-step work across your local files, apps, browser, and connectors on the desktop.</a:t>
-            </a:r>
-          </a:p>
-          <a:p>
-            <a:r>
-              <a:rPr lang="en-US" sz="1800" i="1" dirty="0" smtClean="0">
-                <a:solidFill>
-                  <a:srgbClr val="C00000"/>
-                </a:solidFill>
-              </a:rPr>
-              <a:t>Claude Code</a:t>
-            </a:r>
-            <a:r>
-              <a:rPr lang="en-US" sz="1800" dirty="0" smtClean="0"/>
-              <a:t> is for building software—writing, testing, running, and deploying code, with access to your file system and development tools.</a:t>
-            </a:r>
-            <a:endParaRPr lang="en-US" sz="1800" dirty="0"/>
-          </a:p>
-        </p:txBody>
-      </p:sp>
-    </p:spTree>
-  </p:cSld>
-  <p:clrMapOvr>
-    <a:masterClrMapping/>
-  </p:clrMapOvr>
-</p:sld>
-</file>
-
-<file path=ppt/slides/slide51.xml><?xml version="1.0" encoding="utf-8"?>
+<file path=ppt/slides/slide52.xml><?xml version="1.0" encoding="utf-8"?>
 <p:sld xmlns:a="http://schemas.openxmlformats.org/drawingml/2006/main" xmlns:r="http://schemas.openxmlformats.org/officeDocument/2006/relationships" xmlns:p="http://schemas.openxmlformats.org/presentationml/2006/main">
   <p:cSld>
     <p:spTree>
@@ -8609,7 +8732,7 @@
 </p:sld>
 </file>
 
-<file path=ppt/slides/slide52.xml><?xml version="1.0" encoding="utf-8"?>
+<file path=ppt/slides/slide53.xml><?xml version="1.0" encoding="utf-8"?>
 <p:sld xmlns:a="http://schemas.openxmlformats.org/drawingml/2006/main" xmlns:r="http://schemas.openxmlformats.org/officeDocument/2006/relationships" xmlns:p="http://schemas.openxmlformats.org/presentationml/2006/main">
   <p:cSld>
     <p:spTree>
@@ -8686,7 +8809,7 @@
 </p:sld>
 </file>
 
-<file path=ppt/slides/slide53.xml><?xml version="1.0" encoding="utf-8"?>
+<file path=ppt/slides/slide54.xml><?xml version="1.0" encoding="utf-8"?>
 <p:sld xmlns:a="http://schemas.openxmlformats.org/drawingml/2006/main" xmlns:r="http://schemas.openxmlformats.org/officeDocument/2006/relationships" xmlns:p="http://schemas.openxmlformats.org/presentationml/2006/main">
   <p:cSld>
     <p:spTree>
@@ -9222,14 +9345,22 @@
           <a:p>
             <a:pPr algn="l"/>
             <a:r>
-              <a:rPr lang="en-US" dirty="0" smtClean="0"/>
-              <a:t>5. Install Claude Code on </a:t>
-            </a:r>
-            <a:r>
-              <a:rPr lang="en-US" dirty="0" err="1" smtClean="0"/>
-              <a:t>macOS</a:t>
-            </a:r>
-            <a:endParaRPr lang="en-US" dirty="0"/>
+              <a:rPr lang="en-US" sz="3800" dirty="0" smtClean="0"/>
+              <a:t>5. </a:t>
+            </a:r>
+            <a:r>
+              <a:rPr lang="en-US" sz="3800" dirty="0" smtClean="0"/>
+              <a:t>Uninstall</a:t>
+            </a:r>
+            <a:r>
+              <a:rPr lang="en-US" sz="3800" dirty="0" smtClean="0"/>
+              <a:t> </a:t>
+            </a:r>
+            <a:r>
+              <a:rPr lang="en-US" sz="3800" dirty="0" smtClean="0"/>
+              <a:t>Claude Code on Server 2016</a:t>
+            </a:r>
+            <a:endParaRPr lang="en-US" sz="3800" dirty="0"/>
           </a:p>
         </p:txBody>
       </p:sp>
@@ -9249,43 +9380,46 @@
           <a:lstStyle/>
           <a:p>
             <a:r>
-              <a:rPr lang="en-US" sz="2200" dirty="0" smtClean="0">
-                <a:hlinkClick r:id="rId2"/>
-              </a:rPr>
-              <a:t>https://code.claude.com/docs/en/quickstart</a:t>
-            </a:r>
-            <a:endParaRPr lang="en-US" sz="2200" dirty="0" smtClean="0"/>
-          </a:p>
-          <a:p>
-            <a:r>
-              <a:rPr lang="en-US" sz="2200" dirty="0" smtClean="0"/>
-              <a:t>curl -</a:t>
-            </a:r>
-            <a:r>
-              <a:rPr lang="en-US" sz="2200" dirty="0" err="1" smtClean="0"/>
-              <a:t>fsSL</a:t>
-            </a:r>
-            <a:r>
-              <a:rPr lang="en-US" sz="2200" dirty="0" smtClean="0"/>
-              <a:t> https://claude.ai/install.sh | bash</a:t>
-            </a:r>
-          </a:p>
-          <a:p>
-            <a:r>
-              <a:rPr lang="en-US" sz="2200" dirty="0" smtClean="0"/>
-              <a:t>echo 'export PATH="$HOME/.local/bin:$PATH"' &gt;&gt; ~/.</a:t>
-            </a:r>
-            <a:r>
-              <a:rPr lang="en-US" sz="2200" dirty="0" err="1" smtClean="0"/>
-              <a:t>zshrc</a:t>
-            </a:r>
-            <a:r>
-              <a:rPr lang="en-US" sz="2200" dirty="0" smtClean="0"/>
-              <a:t> &amp;&amp; source ~/.</a:t>
-            </a:r>
-            <a:r>
-              <a:rPr lang="en-US" sz="2200" dirty="0" err="1" smtClean="0"/>
-              <a:t>zshrc</a:t>
+              <a:rPr lang="en-US" sz="2400" dirty="0" err="1" smtClean="0"/>
+              <a:t>npm</a:t>
+            </a:r>
+            <a:r>
+              <a:rPr lang="en-US" sz="2400" dirty="0" smtClean="0"/>
+              <a:t> uninstall -g @</a:t>
+            </a:r>
+            <a:r>
+              <a:rPr lang="en-US" sz="2400" dirty="0" err="1" smtClean="0"/>
+              <a:t>anthropic-ai</a:t>
+            </a:r>
+            <a:r>
+              <a:rPr lang="en-US" sz="2400" dirty="0" smtClean="0"/>
+              <a:t>/</a:t>
+            </a:r>
+            <a:r>
+              <a:rPr lang="en-US" sz="2400" dirty="0" err="1" smtClean="0"/>
+              <a:t>claude</a:t>
+            </a:r>
+            <a:r>
+              <a:rPr lang="en-US" sz="2400" dirty="0" smtClean="0"/>
+              <a:t>-code</a:t>
+            </a:r>
+          </a:p>
+          <a:p>
+            <a:r>
+              <a:rPr lang="en-US" sz="2400" dirty="0" err="1" smtClean="0"/>
+              <a:t>npm</a:t>
+            </a:r>
+            <a:r>
+              <a:rPr lang="en-US" sz="2400" dirty="0" smtClean="0"/>
+              <a:t> install -g @</a:t>
+            </a:r>
+            <a:r>
+              <a:rPr lang="en-US" sz="2400" dirty="0" err="1" smtClean="0"/>
+              <a:t>anthropic-ai</a:t>
+            </a:r>
+            <a:r>
+              <a:rPr lang="en-US" sz="2400" dirty="0" smtClean="0"/>
+              <a:t>/claude-code@2.1.112</a:t>
             </a:r>
             <a:endParaRPr lang="en-US" sz="2200" dirty="0" smtClean="0"/>
           </a:p>
@@ -9293,14 +9427,14 @@
       </p:sp>
       <p:pic>
         <p:nvPicPr>
-          <p:cNvPr id="1026" name="Picture 2"/>
+          <p:cNvPr id="4" name="Picture 2"/>
           <p:cNvPicPr>
             <a:picLocks noChangeAspect="1" noChangeArrowheads="1"/>
           </p:cNvPicPr>
           <p:nvPr/>
         </p:nvPicPr>
         <p:blipFill>
-          <a:blip r:embed="rId3" cstate="print"/>
+          <a:blip r:embed="rId2" cstate="print"/>
           <a:srcRect/>
           <a:stretch>
             <a:fillRect/>
@@ -9308,8 +9442,8 @@
         </p:blipFill>
         <p:spPr bwMode="auto">
           <a:xfrm>
-            <a:off x="1616075" y="3397250"/>
-            <a:ext cx="5911850" cy="2851150"/>
+            <a:off x="1676400" y="3200400"/>
+            <a:ext cx="5327650" cy="2139950"/>
           </a:xfrm>
           <a:prstGeom prst="rect">
             <a:avLst/>

--- a/Software Engineering Capstone/05.4. Claude Code.pptx
+++ b/Software Engineering Capstone/05.4. Claude Code.pptx
@@ -279,7 +279,7 @@
             <a:fld id="{50D0DBAB-D1C9-4D1B-A41F-EB0AC0278643}" type="datetimeFigureOut">
               <a:rPr lang="en-US" smtClean="0"/>
               <a:pPr/>
-              <a:t>7/18/2026</a:t>
+              <a:t>7/20/2026</a:t>
             </a:fld>
             <a:endParaRPr lang="en-US"/>
           </a:p>
@@ -441,7 +441,7 @@
             <a:fld id="{51300FB1-EAA8-41B6-84E0-C0BE923892D9}" type="datetimeFigureOut">
               <a:rPr lang="en-US" smtClean="0"/>
               <a:pPr/>
-              <a:t>7/18/2026</a:t>
+              <a:t>7/20/2026</a:t>
             </a:fld>
             <a:endParaRPr lang="en-US"/>
           </a:p>
@@ -898,7 +898,7 @@
               <a:pPr>
                 <a:defRPr/>
               </a:pPr>
-              <a:t>7/18/2026</a:t>
+              <a:t>7/20/2026</a:t>
             </a:fld>
             <a:endParaRPr lang="en-US"/>
           </a:p>
@@ -1090,7 +1090,7 @@
               <a:pPr>
                 <a:defRPr/>
               </a:pPr>
-              <a:t>7/18/2026</a:t>
+              <a:t>7/20/2026</a:t>
             </a:fld>
             <a:endParaRPr lang="en-US"/>
           </a:p>
@@ -1292,7 +1292,7 @@
               <a:pPr>
                 <a:defRPr/>
               </a:pPr>
-              <a:t>7/18/2026</a:t>
+              <a:t>7/20/2026</a:t>
             </a:fld>
             <a:endParaRPr lang="en-US"/>
           </a:p>
@@ -1484,7 +1484,7 @@
               <a:pPr>
                 <a:defRPr/>
               </a:pPr>
-              <a:t>7/18/2026</a:t>
+              <a:t>7/20/2026</a:t>
             </a:fld>
             <a:endParaRPr lang="en-US"/>
           </a:p>
@@ -1752,7 +1752,7 @@
               <a:pPr>
                 <a:defRPr/>
               </a:pPr>
-              <a:t>7/18/2026</a:t>
+              <a:t>7/20/2026</a:t>
             </a:fld>
             <a:endParaRPr lang="en-US"/>
           </a:p>
@@ -2062,7 +2062,7 @@
               <a:pPr>
                 <a:defRPr/>
               </a:pPr>
-              <a:t>7/18/2026</a:t>
+              <a:t>7/20/2026</a:t>
             </a:fld>
             <a:endParaRPr lang="en-US"/>
           </a:p>
@@ -2506,7 +2506,7 @@
               <a:pPr>
                 <a:defRPr/>
               </a:pPr>
-              <a:t>7/18/2026</a:t>
+              <a:t>7/20/2026</a:t>
             </a:fld>
             <a:endParaRPr lang="en-US"/>
           </a:p>
@@ -2646,7 +2646,7 @@
               <a:pPr>
                 <a:defRPr/>
               </a:pPr>
-              <a:t>7/18/2026</a:t>
+              <a:t>7/20/2026</a:t>
             </a:fld>
             <a:endParaRPr lang="en-US"/>
           </a:p>
@@ -2763,7 +2763,7 @@
               <a:pPr>
                 <a:defRPr/>
               </a:pPr>
-              <a:t>7/18/2026</a:t>
+              <a:t>7/20/2026</a:t>
             </a:fld>
             <a:endParaRPr lang="en-US"/>
           </a:p>
@@ -3062,7 +3062,7 @@
               <a:pPr>
                 <a:defRPr/>
               </a:pPr>
-              <a:t>7/18/2026</a:t>
+              <a:t>7/20/2026</a:t>
             </a:fld>
             <a:endParaRPr lang="en-US"/>
           </a:p>
@@ -3340,7 +3340,7 @@
               <a:pPr>
                 <a:defRPr/>
               </a:pPr>
-              <a:t>7/18/2026</a:t>
+              <a:t>7/20/2026</a:t>
             </a:fld>
             <a:endParaRPr lang="en-US"/>
           </a:p>
@@ -3588,7 +3588,7 @@
               <a:pPr>
                 <a:defRPr/>
               </a:pPr>
-              <a:t>7/18/2026</a:t>
+              <a:t>7/20/2026</a:t>
             </a:fld>
             <a:endParaRPr lang="en-US"/>
           </a:p>
@@ -8104,12 +8104,12 @@
               <a:t>skills:ars</a:t>
             </a:r>
             <a:r>
-              <a:rPr lang="en-US" sz="2400" smtClean="0"/>
+              <a:rPr lang="en-US" sz="2400" dirty="0" smtClean="0"/>
               <a:t>-lit-review</a:t>
             </a:r>
           </a:p>
           <a:p>
-            <a:endParaRPr lang="en-US" sz="2400" smtClean="0"/>
+            <a:endParaRPr lang="en-US" sz="2400" dirty="0" smtClean="0"/>
           </a:p>
         </p:txBody>
       </p:sp>
@@ -9346,19 +9346,7 @@
             <a:pPr algn="l"/>
             <a:r>
               <a:rPr lang="en-US" sz="3800" dirty="0" smtClean="0"/>
-              <a:t>5. </a:t>
-            </a:r>
-            <a:r>
-              <a:rPr lang="en-US" sz="3800" dirty="0" smtClean="0"/>
-              <a:t>Uninstall</a:t>
-            </a:r>
-            <a:r>
-              <a:rPr lang="en-US" sz="3800" dirty="0" smtClean="0"/>
-              <a:t> </a:t>
-            </a:r>
-            <a:r>
-              <a:rPr lang="en-US" sz="3800" dirty="0" smtClean="0"/>
-              <a:t>Claude Code on Server 2016</a:t>
+              <a:t>5. Uninstall Claude Code on Server 2016</a:t>
             </a:r>
             <a:endParaRPr lang="en-US" sz="3800" dirty="0"/>
           </a:p>
